--- a/output/wordlabs-remove-3day.pptx
+++ b/output/wordlabs-remove-3day.pptx
@@ -6040,7 +6040,7 @@
                 <a:ea typeface="Calibri" pitchFamily="34" charset="-122"/>
                 <a:cs typeface="Calibri" pitchFamily="34" charset="-120"/>
               </a:rPr>
-              <a:t>The </a:t>
+              <a:t>The careful </a:t>
             </a:r>
             <a:pPr algn="l" indent="0" marL="0">
               <a:buNone/>
@@ -6071,7 +6071,7 @@
                 <a:ea typeface="Calibri" pitchFamily="34" charset="-122"/>
                 <a:cs typeface="Calibri" pitchFamily="34" charset="-120"/>
               </a:rPr>
-              <a:t> of the old fence was tricky, but the </a:t>
+              <a:t> of the old paint made the wall look brand new, and the </a:t>
             </a:r>
             <a:pPr algn="l" indent="0" marL="0">
               <a:buNone/>
@@ -6102,7 +6102,7 @@
                 <a:ea typeface="Calibri" pitchFamily="34" charset="-122"/>
                 <a:cs typeface="Calibri" pitchFamily="34" charset="-120"/>
               </a:rPr>
-              <a:t> finished the job before lunch.</a:t>
+              <a:t> worked quickly.</a:t>
             </a:r>
             <a:endParaRPr lang="en-US" sz="1800" dirty="0"/>
           </a:p>
@@ -7860,7 +7860,7 @@
                 <a:ea typeface="Calibri" pitchFamily="34" charset="-122"/>
                 <a:cs typeface="Calibri" pitchFamily="34" charset="-120"/>
               </a:rPr>
-              <a:t>again, back</a:t>
+              <a:t>back, again</a:t>
             </a:r>
             <a:endParaRPr lang="en-US" sz="850" dirty="0"/>
           </a:p>
@@ -8996,7 +8996,7 @@
                 <a:ea typeface="Calibri" pitchFamily="34" charset="-122"/>
                 <a:cs typeface="Calibri" pitchFamily="34" charset="-120"/>
               </a:rPr>
-              <a:t>again, back</a:t>
+              <a:t>back, again</a:t>
             </a:r>
             <a:endParaRPr lang="en-US" sz="850" dirty="0"/>
           </a:p>
@@ -10369,7 +10369,7 @@
                 <a:ea typeface="Calibri" pitchFamily="34" charset="-122"/>
                 <a:cs typeface="Calibri" pitchFamily="34" charset="-120"/>
               </a:rPr>
-              <a:t>again, back</a:t>
+              <a:t>back, again</a:t>
             </a:r>
             <a:endParaRPr lang="en-US" sz="850" dirty="0"/>
           </a:p>
@@ -12992,7 +12992,7 @@
                 <a:ea typeface="Calibri" pitchFamily="34" charset="-122"/>
                 <a:cs typeface="Calibri" pitchFamily="34" charset="-120"/>
               </a:rPr>
-              <a:t>again, back</a:t>
+              <a:t>back, again</a:t>
             </a:r>
             <a:endParaRPr lang="en-US" sz="850" dirty="0"/>
           </a:p>
@@ -14089,7 +14089,7 @@
                 <a:ea typeface="Calibri" pitchFamily="34" charset="-122"/>
                 <a:cs typeface="Calibri" pitchFamily="34" charset="-120"/>
               </a:rPr>
-              <a:t>again, back</a:t>
+              <a:t>back, again</a:t>
             </a:r>
             <a:endParaRPr lang="en-US" sz="850" dirty="0"/>
           </a:p>
@@ -15688,7 +15688,7 @@
                 <a:ea typeface="Calibri" pitchFamily="34" charset="-122"/>
                 <a:cs typeface="Calibri" pitchFamily="34" charset="-120"/>
               </a:rPr>
-              <a:t>again, back</a:t>
+              <a:t>back, again</a:t>
             </a:r>
             <a:endParaRPr lang="en-US" sz="850" dirty="0"/>
           </a:p>
@@ -17678,7 +17678,7 @@
                 <a:ea typeface="Trebuchet MS" pitchFamily="34" charset="-122"/>
                 <a:cs typeface="Trebuchet MS" pitchFamily="34" charset="-120"/>
               </a:rPr>
-              <a:t>2</a:t>
+              <a:t>1</a:t>
             </a:r>
             <a:pPr algn="ctr" indent="0" marL="0">
               <a:buNone/>
@@ -17692,7 +17692,7 @@
                 <a:ea typeface="Trebuchet MS" pitchFamily="34" charset="-122"/>
                 <a:cs typeface="Trebuchet MS" pitchFamily="34" charset="-120"/>
               </a:rPr>
-              <a:t>  punctuation marks</a:t>
+              <a:t>  punctuation mark</a:t>
             </a:r>
             <a:endParaRPr lang="en-US" sz="2800" dirty="0"/>
           </a:p>
@@ -18096,7 +18096,7 @@
                 <a:ea typeface="Calibri" pitchFamily="34" charset="-122"/>
                 <a:cs typeface="Calibri" pitchFamily="34" charset="-120"/>
               </a:rPr>
-              <a:t>During the </a:t>
+              <a:t>She was </a:t>
             </a:r>
             <a:pPr algn="l" indent="0" marL="0">
               <a:buNone/>
@@ -18113,7 +18113,7 @@
                 <a:ea typeface="Calibri" pitchFamily="34" charset="-122"/>
                 <a:cs typeface="Calibri" pitchFamily="34" charset="-120"/>
               </a:rPr>
-              <a:t>removal</a:t>
+              <a:t>removing</a:t>
             </a:r>
             <a:pPr algn="l" indent="0" marL="0">
               <a:buNone/>
@@ -18127,7 +18127,7 @@
                 <a:ea typeface="Calibri" pitchFamily="34" charset="-122"/>
                 <a:cs typeface="Calibri" pitchFamily="34" charset="-120"/>
               </a:rPr>
-              <a:t> of the old shed, the </a:t>
+              <a:t> the </a:t>
             </a:r>
             <a:pPr algn="l" indent="0" marL="0">
               <a:buNone/>
@@ -18144,7 +18144,7 @@
                 <a:ea typeface="Calibri" pitchFamily="34" charset="-122"/>
                 <a:cs typeface="Calibri" pitchFamily="34" charset="-120"/>
               </a:rPr>
-              <a:t>remover</a:t>
+              <a:t>removable</a:t>
             </a:r>
             <a:pPr algn="l" indent="0" marL="0">
               <a:buNone/>
@@ -18158,7 +18158,7 @@
                 <a:ea typeface="Calibri" pitchFamily="34" charset="-122"/>
                 <a:cs typeface="Calibri" pitchFamily="34" charset="-120"/>
               </a:rPr>
-              <a:t> found that one wall was </a:t>
+              <a:t> labels, but one </a:t>
             </a:r>
             <a:pPr algn="l" indent="0" marL="0">
               <a:buNone/>
@@ -18189,7 +18189,7 @@
                 <a:ea typeface="Calibri" pitchFamily="34" charset="-122"/>
                 <a:cs typeface="Calibri" pitchFamily="34" charset="-120"/>
               </a:rPr>
-              <a:t>, so they called for help.</a:t>
+              <a:t> sticker stayed stuck to the lid.</a:t>
             </a:r>
             <a:endParaRPr lang="en-US" sz="1800" dirty="0"/>
           </a:p>
@@ -18344,7 +18344,7 @@
                 <a:ea typeface="Trebuchet MS" pitchFamily="34" charset="-122"/>
                 <a:cs typeface="Trebuchet MS" pitchFamily="34" charset="-120"/>
               </a:rPr>
-              <a:t>removal</a:t>
+              <a:t>removing</a:t>
             </a:r>
             <a:endParaRPr lang="en-US" sz="1400" dirty="0"/>
           </a:p>
@@ -18472,7 +18472,7 @@
                 <a:ea typeface="Trebuchet MS" pitchFamily="34" charset="-122"/>
                 <a:cs typeface="Trebuchet MS" pitchFamily="34" charset="-120"/>
               </a:rPr>
-              <a:t>remover</a:t>
+              <a:t>removable</a:t>
             </a:r>
             <a:endParaRPr lang="en-US" sz="1400" dirty="0"/>
           </a:p>
@@ -19070,7 +19070,7 @@
                 <a:ea typeface="Trebuchet MS" pitchFamily="34" charset="-122"/>
                 <a:cs typeface="Trebuchet MS" pitchFamily="34" charset="-120"/>
               </a:rPr>
-              <a:t>removal</a:t>
+              <a:t>removing</a:t>
             </a:r>
             <a:endParaRPr lang="en-US" sz="2800" dirty="0"/>
           </a:p>
@@ -19897,7 +19897,7 @@
                 <a:ea typeface="Trebuchet MS" pitchFamily="34" charset="-122"/>
                 <a:cs typeface="Trebuchet MS" pitchFamily="34" charset="-120"/>
               </a:rPr>
-              <a:t>removal</a:t>
+              <a:t>removing</a:t>
             </a:r>
             <a:endParaRPr lang="en-US" sz="2800" dirty="0"/>
           </a:p>
@@ -20075,7 +20075,7 @@
                 <a:ea typeface="Calibri" pitchFamily="34" charset="-122"/>
                 <a:cs typeface="Calibri" pitchFamily="34" charset="-120"/>
               </a:rPr>
-              <a:t>again, back</a:t>
+              <a:t>back, again</a:t>
             </a:r>
             <a:endParaRPr lang="en-US" sz="850" dirty="0"/>
           </a:p>
@@ -20260,7 +20260,7 @@
                 <a:ea typeface="Trebuchet MS" pitchFamily="34" charset="-122"/>
                 <a:cs typeface="Trebuchet MS" pitchFamily="34" charset="-120"/>
               </a:rPr>
-              <a:t>al</a:t>
+              <a:t>ing</a:t>
             </a:r>
             <a:endParaRPr lang="en-US" sz="1300" dirty="0"/>
           </a:p>
@@ -20299,7 +20299,7 @@
                 <a:ea typeface="Calibri" pitchFamily="34" charset="-122"/>
                 <a:cs typeface="Calibri" pitchFamily="34" charset="-120"/>
               </a:rPr>
-              <a:t>relating to, the act of</a:t>
+              <a:t>ongoing action</a:t>
             </a:r>
             <a:endParaRPr lang="en-US" sz="850" dirty="0"/>
           </a:p>
@@ -21033,7 +21033,7 @@
                 <a:ea typeface="Trebuchet MS" pitchFamily="34" charset="-122"/>
                 <a:cs typeface="Trebuchet MS" pitchFamily="34" charset="-120"/>
               </a:rPr>
-              <a:t>removal</a:t>
+              <a:t>removing</a:t>
             </a:r>
             <a:endParaRPr lang="en-US" sz="2800" dirty="0"/>
           </a:p>
@@ -21211,7 +21211,7 @@
                 <a:ea typeface="Calibri" pitchFamily="34" charset="-122"/>
                 <a:cs typeface="Calibri" pitchFamily="34" charset="-120"/>
               </a:rPr>
-              <a:t>again, back</a:t>
+              <a:t>back, again</a:t>
             </a:r>
             <a:endParaRPr lang="en-US" sz="850" dirty="0"/>
           </a:p>
@@ -21396,7 +21396,7 @@
                 <a:ea typeface="Trebuchet MS" pitchFamily="34" charset="-122"/>
                 <a:cs typeface="Trebuchet MS" pitchFamily="34" charset="-120"/>
               </a:rPr>
-              <a:t>al</a:t>
+              <a:t>ing</a:t>
             </a:r>
             <a:endParaRPr lang="en-US" sz="1300" dirty="0"/>
           </a:p>
@@ -21435,7 +21435,7 @@
                 <a:ea typeface="Calibri" pitchFamily="34" charset="-122"/>
                 <a:cs typeface="Calibri" pitchFamily="34" charset="-120"/>
               </a:rPr>
-              <a:t>relating to, the act of</a:t>
+              <a:t>ongoing action</a:t>
             </a:r>
             <a:endParaRPr lang="en-US" sz="850" dirty="0"/>
           </a:p>
@@ -21843,7 +21843,7 @@
                 <a:ea typeface="Trebuchet MS" pitchFamily="34" charset="-122"/>
                 <a:cs typeface="Trebuchet MS" pitchFamily="34" charset="-120"/>
               </a:rPr>
-              <a:t>al</a:t>
+              <a:t>ing</a:t>
             </a:r>
             <a:endParaRPr lang="en-US" sz="1400" dirty="0"/>
           </a:p>
@@ -22406,7 +22406,7 @@
                 <a:ea typeface="Trebuchet MS" pitchFamily="34" charset="-122"/>
                 <a:cs typeface="Trebuchet MS" pitchFamily="34" charset="-120"/>
               </a:rPr>
-              <a:t>removal</a:t>
+              <a:t>removing</a:t>
             </a:r>
             <a:endParaRPr lang="en-US" sz="2800" dirty="0"/>
           </a:p>
@@ -22584,7 +22584,7 @@
                 <a:ea typeface="Calibri" pitchFamily="34" charset="-122"/>
                 <a:cs typeface="Calibri" pitchFamily="34" charset="-120"/>
               </a:rPr>
-              <a:t>again, back</a:t>
+              <a:t>back, again</a:t>
             </a:r>
             <a:endParaRPr lang="en-US" sz="850" dirty="0"/>
           </a:p>
@@ -22769,7 +22769,7 @@
                 <a:ea typeface="Trebuchet MS" pitchFamily="34" charset="-122"/>
                 <a:cs typeface="Trebuchet MS" pitchFamily="34" charset="-120"/>
               </a:rPr>
-              <a:t>al</a:t>
+              <a:t>ing</a:t>
             </a:r>
             <a:endParaRPr lang="en-US" sz="1300" dirty="0"/>
           </a:p>
@@ -22808,7 +22808,7 @@
                 <a:ea typeface="Calibri" pitchFamily="34" charset="-122"/>
                 <a:cs typeface="Calibri" pitchFamily="34" charset="-120"/>
               </a:rPr>
-              <a:t>relating to, the act of</a:t>
+              <a:t>ongoing action</a:t>
             </a:r>
             <a:endParaRPr lang="en-US" sz="850" dirty="0"/>
           </a:p>
@@ -23216,7 +23216,7 @@
                 <a:ea typeface="Trebuchet MS" pitchFamily="34" charset="-122"/>
                 <a:cs typeface="Trebuchet MS" pitchFamily="34" charset="-120"/>
               </a:rPr>
-              <a:t>al</a:t>
+              <a:t>ing</a:t>
             </a:r>
             <a:endParaRPr lang="en-US" sz="1400" dirty="0"/>
           </a:p>
@@ -23323,7 +23323,7 @@
         </p:nvSpPr>
         <p:spPr>
           <a:xfrm>
-            <a:off x="2124837" y="4169664"/>
+            <a:off x="2254649" y="4169664"/>
             <a:ext cx="685800" cy="475488"/>
           </a:xfrm>
           <a:prstGeom prst="rect">
@@ -23350,7 +23350,7 @@
         </p:nvSpPr>
         <p:spPr>
           <a:xfrm>
-            <a:off x="2124837" y="4169664"/>
+            <a:off x="2254649" y="4169664"/>
             <a:ext cx="685800" cy="475488"/>
           </a:xfrm>
           <a:prstGeom prst="rect">
@@ -23389,7 +23389,7 @@
         </p:nvSpPr>
         <p:spPr>
           <a:xfrm>
-            <a:off x="3033522" y="4169664"/>
+            <a:off x="3293146" y="4169664"/>
             <a:ext cx="685800" cy="475488"/>
           </a:xfrm>
           <a:prstGeom prst="rect">
@@ -23416,7 +23416,7 @@
         </p:nvSpPr>
         <p:spPr>
           <a:xfrm>
-            <a:off x="3033522" y="4169664"/>
+            <a:off x="3293146" y="4169664"/>
             <a:ext cx="685800" cy="475488"/>
           </a:xfrm>
           <a:prstGeom prst="rect">
@@ -23455,7 +23455,7 @@
         </p:nvSpPr>
         <p:spPr>
           <a:xfrm>
-            <a:off x="3942207" y="4169664"/>
+            <a:off x="4331643" y="4169664"/>
             <a:ext cx="685800" cy="475488"/>
           </a:xfrm>
           <a:prstGeom prst="rect">
@@ -23482,7 +23482,7 @@
         </p:nvSpPr>
         <p:spPr>
           <a:xfrm>
-            <a:off x="3942207" y="4169664"/>
+            <a:off x="4331643" y="4169664"/>
             <a:ext cx="685800" cy="475488"/>
           </a:xfrm>
           <a:prstGeom prst="rect">
@@ -23521,7 +23521,7 @@
         </p:nvSpPr>
         <p:spPr>
           <a:xfrm>
-            <a:off x="4850892" y="4169664"/>
+            <a:off x="5370141" y="4169664"/>
             <a:ext cx="685800" cy="475488"/>
           </a:xfrm>
           <a:prstGeom prst="rect">
@@ -23548,7 +23548,7 @@
         </p:nvSpPr>
         <p:spPr>
           <a:xfrm>
-            <a:off x="4850892" y="4169664"/>
+            <a:off x="5370141" y="4169664"/>
             <a:ext cx="685800" cy="475488"/>
           </a:xfrm>
           <a:prstGeom prst="rect">
@@ -23587,7 +23587,7 @@
         </p:nvSpPr>
         <p:spPr>
           <a:xfrm>
-            <a:off x="5759577" y="4169664"/>
+            <a:off x="6408638" y="4169664"/>
             <a:ext cx="685800" cy="475488"/>
           </a:xfrm>
           <a:prstGeom prst="rect">
@@ -23614,7 +23614,7 @@
         </p:nvSpPr>
         <p:spPr>
           <a:xfrm>
-            <a:off x="5759577" y="4169664"/>
+            <a:off x="6408638" y="4169664"/>
             <a:ext cx="685800" cy="475488"/>
           </a:xfrm>
           <a:prstGeom prst="rect">
@@ -23653,7 +23653,7 @@
         </p:nvSpPr>
         <p:spPr>
           <a:xfrm>
-            <a:off x="6668262" y="4169664"/>
+            <a:off x="7447135" y="4169664"/>
             <a:ext cx="685800" cy="475488"/>
           </a:xfrm>
           <a:prstGeom prst="rect">
@@ -23680,7 +23680,7 @@
         </p:nvSpPr>
         <p:spPr>
           <a:xfrm>
-            <a:off x="6668262" y="4169664"/>
+            <a:off x="7447135" y="4169664"/>
             <a:ext cx="685800" cy="475488"/>
           </a:xfrm>
           <a:prstGeom prst="rect">
@@ -23705,73 +23705,7 @@
                 <a:ea typeface="Trebuchet MS" pitchFamily="34" charset="-122"/>
                 <a:cs typeface="Trebuchet MS" pitchFamily="34" charset="-120"/>
               </a:rPr>
-              <a:t>a</a:t>
-            </a:r>
-            <a:endParaRPr lang="en-US" sz="900" dirty="0"/>
-          </a:p>
-        </p:txBody>
-      </p:sp>
-      <p:sp>
-        <p:nvSpPr>
-          <p:cNvPr id="52" name="Shape 50"/>
-          <p:cNvSpPr/>
-          <p:nvPr/>
-        </p:nvSpPr>
-        <p:spPr>
-          <a:xfrm>
-            <a:off x="7576947" y="4169664"/>
-            <a:ext cx="685800" cy="475488"/>
-          </a:xfrm>
-          <a:prstGeom prst="rect">
-            <a:avLst>
-              <a:gd name="adj" fmla="val 7692"/>
-            </a:avLst>
-          </a:prstGeom>
-          <a:solidFill>
-            <a:srgbClr val="FFFFFF"/>
-          </a:solidFill>
-          <a:ln w="12700">
-            <a:solidFill>
-              <a:srgbClr val="DB2777"/>
-            </a:solidFill>
-            <a:prstDash val="solid"/>
-          </a:ln>
-        </p:spPr>
-      </p:sp>
-      <p:sp>
-        <p:nvSpPr>
-          <p:cNvPr id="53" name="Text 51"/>
-          <p:cNvSpPr/>
-          <p:nvPr/>
-        </p:nvSpPr>
-        <p:spPr>
-          <a:xfrm>
-            <a:off x="7576947" y="4169664"/>
-            <a:ext cx="685800" cy="475488"/>
-          </a:xfrm>
-          <a:prstGeom prst="rect">
-            <a:avLst/>
-          </a:prstGeom>
-          <a:noFill/>
-          <a:ln/>
-        </p:spPr>
-        <p:txBody>
-          <a:bodyPr wrap="square" lIns="0" tIns="0" rIns="0" bIns="0" rtlCol="0" anchor="ctr"/>
-          <a:lstStyle/>
-          <a:p>
-            <a:pPr algn="ctr" indent="0" marL="0">
-              <a:buNone/>
-            </a:pPr>
-            <a:r>
-              <a:rPr lang="en-US" sz="900" b="1" dirty="0">
-                <a:solidFill>
-                  <a:srgbClr val="9D174D"/>
-                </a:solidFill>
-                <a:latin typeface="Trebuchet MS" pitchFamily="34" charset="0"/>
-                <a:ea typeface="Trebuchet MS" pitchFamily="34" charset="-122"/>
-                <a:cs typeface="Trebuchet MS" pitchFamily="34" charset="-120"/>
-              </a:rPr>
-              <a:t>l</a:t>
+              <a:t>ing</a:t>
             </a:r>
             <a:endParaRPr lang="en-US" sz="900" dirty="0"/>
           </a:p>
@@ -24202,7 +24136,7 @@
                 <a:ea typeface="Trebuchet MS" pitchFamily="34" charset="-122"/>
                 <a:cs typeface="Trebuchet MS" pitchFamily="34" charset="-120"/>
               </a:rPr>
-              <a:t>remover</a:t>
+              <a:t>removable</a:t>
             </a:r>
             <a:endParaRPr lang="en-US" sz="2800" dirty="0"/>
           </a:p>
@@ -25029,7 +24963,7 @@
                 <a:ea typeface="Trebuchet MS" pitchFamily="34" charset="-122"/>
                 <a:cs typeface="Trebuchet MS" pitchFamily="34" charset="-120"/>
               </a:rPr>
-              <a:t>remover</a:t>
+              <a:t>removable</a:t>
             </a:r>
             <a:endParaRPr lang="en-US" sz="2800" dirty="0"/>
           </a:p>
@@ -25207,7 +25141,7 @@
                 <a:ea typeface="Calibri" pitchFamily="34" charset="-122"/>
                 <a:cs typeface="Calibri" pitchFamily="34" charset="-120"/>
               </a:rPr>
-              <a:t>again, back</a:t>
+              <a:t>back, again</a:t>
             </a:r>
             <a:endParaRPr lang="en-US" sz="850" dirty="0"/>
           </a:p>
@@ -25392,7 +25326,7 @@
                 <a:ea typeface="Trebuchet MS" pitchFamily="34" charset="-122"/>
                 <a:cs typeface="Trebuchet MS" pitchFamily="34" charset="-120"/>
               </a:rPr>
-              <a:t>er</a:t>
+              <a:t>able</a:t>
             </a:r>
             <a:endParaRPr lang="en-US" sz="1300" dirty="0"/>
           </a:p>
@@ -25431,7 +25365,7 @@
                 <a:ea typeface="Calibri" pitchFamily="34" charset="-122"/>
                 <a:cs typeface="Calibri" pitchFamily="34" charset="-120"/>
               </a:rPr>
-              <a:t>one who, something that</a:t>
+              <a:t>able to be</a:t>
             </a:r>
             <a:endParaRPr lang="en-US" sz="850" dirty="0"/>
           </a:p>
@@ -25439,7 +25373,46 @@
       </p:sp>
       <p:sp>
         <p:nvSpPr>
-          <p:cNvPr id="25" name="Shape 23"/>
+          <p:cNvPr id="25" name="Text 23"/>
+          <p:cNvSpPr/>
+          <p:nvPr/>
+        </p:nvSpPr>
+        <p:spPr>
+          <a:xfrm>
+            <a:off x="6519672" y="2752344"/>
+            <a:ext cx="1828800" cy="182880"/>
+          </a:xfrm>
+          <a:prstGeom prst="rect">
+            <a:avLst/>
+          </a:prstGeom>
+          <a:noFill/>
+          <a:ln/>
+        </p:spPr>
+        <p:txBody>
+          <a:bodyPr wrap="square" lIns="0" tIns="0" rIns="0" bIns="0" rtlCol="0" anchor="t"/>
+          <a:lstStyle/>
+          <a:p>
+            <a:pPr algn="ctr" indent="0" marL="0">
+              <a:buNone/>
+            </a:pPr>
+            <a:r>
+              <a:rPr lang="en-US" sz="700" i="1" dirty="0">
+                <a:solidFill>
+                  <a:srgbClr val="94A3B8"/>
+                </a:solidFill>
+                <a:latin typeface="Calibri" pitchFamily="34" charset="0"/>
+                <a:ea typeface="Calibri" pitchFamily="34" charset="-122"/>
+                <a:cs typeface="Calibri" pitchFamily="34" charset="-120"/>
+              </a:rPr>
+              <a:t>'e' dropped before vowel suffix</a:t>
+            </a:r>
+            <a:endParaRPr lang="en-US" sz="700" dirty="0"/>
+          </a:p>
+        </p:txBody>
+      </p:sp>
+      <p:sp>
+        <p:nvSpPr>
+          <p:cNvPr id="26" name="Shape 24"/>
           <p:cNvSpPr/>
           <p:nvPr/>
         </p:nvSpPr>
@@ -25466,7 +25439,7 @@
       </p:sp>
       <p:sp>
         <p:nvSpPr>
-          <p:cNvPr id="26" name="Text 24"/>
+          <p:cNvPr id="27" name="Text 25"/>
           <p:cNvSpPr/>
           <p:nvPr/>
         </p:nvSpPr>
@@ -25505,7 +25478,7 @@
       </p:sp>
       <p:sp>
         <p:nvSpPr>
-          <p:cNvPr id="27" name="Shape 25"/>
+          <p:cNvPr id="28" name="Shape 26"/>
           <p:cNvSpPr/>
           <p:nvPr/>
         </p:nvSpPr>
@@ -25532,7 +25505,7 @@
       </p:sp>
       <p:sp>
         <p:nvSpPr>
-          <p:cNvPr id="28" name="Text 26"/>
+          <p:cNvPr id="29" name="Text 27"/>
           <p:cNvSpPr/>
           <p:nvPr/>
         </p:nvSpPr>
@@ -25571,7 +25544,7 @@
       </p:sp>
       <p:sp>
         <p:nvSpPr>
-          <p:cNvPr id="29" name="Shape 27"/>
+          <p:cNvPr id="30" name="Shape 28"/>
           <p:cNvSpPr/>
           <p:nvPr/>
         </p:nvSpPr>
@@ -25598,7 +25571,7 @@
       </p:sp>
       <p:sp>
         <p:nvSpPr>
-          <p:cNvPr id="30" name="Text 28"/>
+          <p:cNvPr id="31" name="Text 29"/>
           <p:cNvSpPr/>
           <p:nvPr/>
         </p:nvSpPr>
@@ -25637,7 +25610,7 @@
       </p:sp>
       <p:sp>
         <p:nvSpPr>
-          <p:cNvPr id="31" name="Shape 29"/>
+          <p:cNvPr id="32" name="Shape 30"/>
           <p:cNvSpPr/>
           <p:nvPr/>
         </p:nvSpPr>
@@ -25664,7 +25637,7 @@
       </p:sp>
       <p:sp>
         <p:nvSpPr>
-          <p:cNvPr id="32" name="Text 30"/>
+          <p:cNvPr id="33" name="Text 31"/>
           <p:cNvSpPr/>
           <p:nvPr/>
         </p:nvSpPr>
@@ -26845,7 +26818,7 @@
                 <a:ea typeface="Trebuchet MS" pitchFamily="34" charset="-122"/>
                 <a:cs typeface="Trebuchet MS" pitchFamily="34" charset="-120"/>
               </a:rPr>
-              <a:t>remover</a:t>
+              <a:t>removable</a:t>
             </a:r>
             <a:endParaRPr lang="en-US" sz="2800" dirty="0"/>
           </a:p>
@@ -27023,7 +26996,7 @@
                 <a:ea typeface="Calibri" pitchFamily="34" charset="-122"/>
                 <a:cs typeface="Calibri" pitchFamily="34" charset="-120"/>
               </a:rPr>
-              <a:t>again, back</a:t>
+              <a:t>back, again</a:t>
             </a:r>
             <a:endParaRPr lang="en-US" sz="850" dirty="0"/>
           </a:p>
@@ -27208,7 +27181,7 @@
                 <a:ea typeface="Trebuchet MS" pitchFamily="34" charset="-122"/>
                 <a:cs typeface="Trebuchet MS" pitchFamily="34" charset="-120"/>
               </a:rPr>
-              <a:t>er</a:t>
+              <a:t>able</a:t>
             </a:r>
             <a:endParaRPr lang="en-US" sz="1300" dirty="0"/>
           </a:p>
@@ -27247,7 +27220,7 @@
                 <a:ea typeface="Calibri" pitchFamily="34" charset="-122"/>
                 <a:cs typeface="Calibri" pitchFamily="34" charset="-120"/>
               </a:rPr>
-              <a:t>one who, something that</a:t>
+              <a:t>able to be</a:t>
             </a:r>
             <a:endParaRPr lang="en-US" sz="850" dirty="0"/>
           </a:p>
@@ -27255,7 +27228,46 @@
       </p:sp>
       <p:sp>
         <p:nvSpPr>
-          <p:cNvPr id="25" name="Shape 23"/>
+          <p:cNvPr id="25" name="Text 23"/>
+          <p:cNvSpPr/>
+          <p:nvPr/>
+        </p:nvSpPr>
+        <p:spPr>
+          <a:xfrm>
+            <a:off x="6519672" y="2752344"/>
+            <a:ext cx="1828800" cy="182880"/>
+          </a:xfrm>
+          <a:prstGeom prst="rect">
+            <a:avLst/>
+          </a:prstGeom>
+          <a:noFill/>
+          <a:ln/>
+        </p:spPr>
+        <p:txBody>
+          <a:bodyPr wrap="square" lIns="0" tIns="0" rIns="0" bIns="0" rtlCol="0" anchor="t"/>
+          <a:lstStyle/>
+          <a:p>
+            <a:pPr algn="ctr" indent="0" marL="0">
+              <a:buNone/>
+            </a:pPr>
+            <a:r>
+              <a:rPr lang="en-US" sz="700" i="1" dirty="0">
+                <a:solidFill>
+                  <a:srgbClr val="94A3B8"/>
+                </a:solidFill>
+                <a:latin typeface="Calibri" pitchFamily="34" charset="0"/>
+                <a:ea typeface="Calibri" pitchFamily="34" charset="-122"/>
+                <a:cs typeface="Calibri" pitchFamily="34" charset="-120"/>
+              </a:rPr>
+              <a:t>'e' dropped before vowel suffix</a:t>
+            </a:r>
+            <a:endParaRPr lang="en-US" sz="700" dirty="0"/>
+          </a:p>
+        </p:txBody>
+      </p:sp>
+      <p:sp>
+        <p:nvSpPr>
+          <p:cNvPr id="26" name="Shape 24"/>
           <p:cNvSpPr/>
           <p:nvPr/>
         </p:nvSpPr>
@@ -27282,7 +27294,7 @@
       </p:sp>
       <p:sp>
         <p:nvSpPr>
-          <p:cNvPr id="26" name="Text 24"/>
+          <p:cNvPr id="27" name="Text 25"/>
           <p:cNvSpPr/>
           <p:nvPr/>
         </p:nvSpPr>
@@ -27321,7 +27333,7 @@
       </p:sp>
       <p:sp>
         <p:nvSpPr>
-          <p:cNvPr id="27" name="Shape 25"/>
+          <p:cNvPr id="28" name="Shape 26"/>
           <p:cNvSpPr/>
           <p:nvPr/>
         </p:nvSpPr>
@@ -27348,14 +27360,14 @@
       </p:sp>
       <p:sp>
         <p:nvSpPr>
-          <p:cNvPr id="28" name="Shape 26"/>
-          <p:cNvSpPr/>
-          <p:nvPr/>
-        </p:nvSpPr>
-        <p:spPr>
-          <a:xfrm>
-            <a:off x="2313432" y="3364992"/>
-            <a:ext cx="1645920" cy="475488"/>
+          <p:cNvPr id="29" name="Shape 27"/>
+          <p:cNvSpPr/>
+          <p:nvPr/>
+        </p:nvSpPr>
+        <p:spPr>
+          <a:xfrm>
+            <a:off x="1975104" y="3364992"/>
+            <a:ext cx="1554480" cy="475488"/>
           </a:xfrm>
           <a:prstGeom prst="rect">
             <a:avLst>
@@ -27375,14 +27387,14 @@
       </p:sp>
       <p:sp>
         <p:nvSpPr>
-          <p:cNvPr id="29" name="Text 27"/>
-          <p:cNvSpPr/>
-          <p:nvPr/>
-        </p:nvSpPr>
-        <p:spPr>
-          <a:xfrm>
-            <a:off x="2313432" y="3364992"/>
-            <a:ext cx="1645920" cy="475488"/>
+          <p:cNvPr id="30" name="Text 28"/>
+          <p:cNvSpPr/>
+          <p:nvPr/>
+        </p:nvSpPr>
+        <p:spPr>
+          <a:xfrm>
+            <a:off x="1975104" y="3364992"/>
+            <a:ext cx="1554480" cy="475488"/>
           </a:xfrm>
           <a:prstGeom prst="rect">
             <a:avLst/>
@@ -27414,14 +27426,14 @@
       </p:sp>
       <p:sp>
         <p:nvSpPr>
-          <p:cNvPr id="30" name="Text 28"/>
-          <p:cNvSpPr/>
-          <p:nvPr/>
-        </p:nvSpPr>
-        <p:spPr>
-          <a:xfrm>
-            <a:off x="3959352" y="3364992"/>
-            <a:ext cx="411480" cy="475488"/>
+          <p:cNvPr id="31" name="Text 29"/>
+          <p:cNvSpPr/>
+          <p:nvPr/>
+        </p:nvSpPr>
+        <p:spPr>
+          <a:xfrm>
+            <a:off x="3529584" y="3364992"/>
+            <a:ext cx="73152" cy="475488"/>
           </a:xfrm>
           <a:prstGeom prst="rect">
             <a:avLst/>
@@ -27453,14 +27465,14 @@
       </p:sp>
       <p:sp>
         <p:nvSpPr>
-          <p:cNvPr id="31" name="Shape 29"/>
-          <p:cNvSpPr/>
-          <p:nvPr/>
-        </p:nvSpPr>
-        <p:spPr>
-          <a:xfrm>
-            <a:off x="4370832" y="3364992"/>
-            <a:ext cx="1645920" cy="475488"/>
+          <p:cNvPr id="32" name="Shape 30"/>
+          <p:cNvSpPr/>
+          <p:nvPr/>
+        </p:nvSpPr>
+        <p:spPr>
+          <a:xfrm>
+            <a:off x="3602736" y="3364992"/>
+            <a:ext cx="1554480" cy="475488"/>
           </a:xfrm>
           <a:prstGeom prst="rect">
             <a:avLst>
@@ -27480,14 +27492,14 @@
       </p:sp>
       <p:sp>
         <p:nvSpPr>
-          <p:cNvPr id="32" name="Text 30"/>
-          <p:cNvSpPr/>
-          <p:nvPr/>
-        </p:nvSpPr>
-        <p:spPr>
-          <a:xfrm>
-            <a:off x="4370832" y="3364992"/>
-            <a:ext cx="1645920" cy="475488"/>
+          <p:cNvPr id="33" name="Text 31"/>
+          <p:cNvSpPr/>
+          <p:nvPr/>
+        </p:nvSpPr>
+        <p:spPr>
+          <a:xfrm>
+            <a:off x="3602736" y="3364992"/>
+            <a:ext cx="1554480" cy="475488"/>
           </a:xfrm>
           <a:prstGeom prst="rect">
             <a:avLst/>
@@ -27519,14 +27531,14 @@
       </p:sp>
       <p:sp>
         <p:nvSpPr>
-          <p:cNvPr id="33" name="Text 31"/>
-          <p:cNvSpPr/>
-          <p:nvPr/>
-        </p:nvSpPr>
-        <p:spPr>
-          <a:xfrm>
-            <a:off x="6016752" y="3364992"/>
-            <a:ext cx="411480" cy="475488"/>
+          <p:cNvPr id="34" name="Text 32"/>
+          <p:cNvSpPr/>
+          <p:nvPr/>
+        </p:nvSpPr>
+        <p:spPr>
+          <a:xfrm>
+            <a:off x="5157216" y="3364992"/>
+            <a:ext cx="73152" cy="475488"/>
           </a:xfrm>
           <a:prstGeom prst="rect">
             <a:avLst/>
@@ -27558,14 +27570,14 @@
       </p:sp>
       <p:sp>
         <p:nvSpPr>
-          <p:cNvPr id="34" name="Shape 32"/>
-          <p:cNvSpPr/>
-          <p:nvPr/>
-        </p:nvSpPr>
-        <p:spPr>
-          <a:xfrm>
-            <a:off x="6428232" y="3364992"/>
-            <a:ext cx="1645920" cy="475488"/>
+          <p:cNvPr id="35" name="Shape 33"/>
+          <p:cNvSpPr/>
+          <p:nvPr/>
+        </p:nvSpPr>
+        <p:spPr>
+          <a:xfrm>
+            <a:off x="5230368" y="3364992"/>
+            <a:ext cx="1554480" cy="475488"/>
           </a:xfrm>
           <a:prstGeom prst="rect">
             <a:avLst>
@@ -27585,14 +27597,14 @@
       </p:sp>
       <p:sp>
         <p:nvSpPr>
-          <p:cNvPr id="35" name="Text 33"/>
-          <p:cNvSpPr/>
-          <p:nvPr/>
-        </p:nvSpPr>
-        <p:spPr>
-          <a:xfrm>
-            <a:off x="6428232" y="3364992"/>
-            <a:ext cx="1645920" cy="475488"/>
+          <p:cNvPr id="36" name="Text 34"/>
+          <p:cNvSpPr/>
+          <p:nvPr/>
+        </p:nvSpPr>
+        <p:spPr>
+          <a:xfrm>
+            <a:off x="5230368" y="3364992"/>
+            <a:ext cx="1554480" cy="475488"/>
           </a:xfrm>
           <a:prstGeom prst="rect">
             <a:avLst/>
@@ -27616,7 +27628,7 @@
                 <a:ea typeface="Trebuchet MS" pitchFamily="34" charset="-122"/>
                 <a:cs typeface="Trebuchet MS" pitchFamily="34" charset="-120"/>
               </a:rPr>
-              <a:t>er</a:t>
+              <a:t>a</a:t>
             </a:r>
             <a:endParaRPr lang="en-US" sz="1400" dirty="0"/>
           </a:p>
@@ -27624,7 +27636,112 @@
       </p:sp>
       <p:sp>
         <p:nvSpPr>
-          <p:cNvPr id="36" name="Shape 34"/>
+          <p:cNvPr id="37" name="Text 35"/>
+          <p:cNvSpPr/>
+          <p:nvPr/>
+        </p:nvSpPr>
+        <p:spPr>
+          <a:xfrm>
+            <a:off x="6784848" y="3364992"/>
+            <a:ext cx="73152" cy="475488"/>
+          </a:xfrm>
+          <a:prstGeom prst="rect">
+            <a:avLst/>
+          </a:prstGeom>
+          <a:noFill/>
+          <a:ln/>
+        </p:spPr>
+        <p:txBody>
+          <a:bodyPr wrap="square" lIns="0" tIns="0" rIns="0" bIns="0" rtlCol="0" anchor="ctr"/>
+          <a:lstStyle/>
+          <a:p>
+            <a:pPr algn="ctr" indent="0" marL="0">
+              <a:buNone/>
+            </a:pPr>
+            <a:r>
+              <a:rPr lang="en-US" sz="1600" b="1" dirty="0">
+                <a:solidFill>
+                  <a:srgbClr val="0D9488"/>
+                </a:solidFill>
+                <a:latin typeface="Trebuchet MS" pitchFamily="34" charset="0"/>
+                <a:ea typeface="Trebuchet MS" pitchFamily="34" charset="-122"/>
+                <a:cs typeface="Trebuchet MS" pitchFamily="34" charset="-120"/>
+              </a:rPr>
+              <a:t>·</a:t>
+            </a:r>
+            <a:endParaRPr lang="en-US" sz="1600" dirty="0"/>
+          </a:p>
+        </p:txBody>
+      </p:sp>
+      <p:sp>
+        <p:nvSpPr>
+          <p:cNvPr id="38" name="Shape 36"/>
+          <p:cNvSpPr/>
+          <p:nvPr/>
+        </p:nvSpPr>
+        <p:spPr>
+          <a:xfrm>
+            <a:off x="6858000" y="3364992"/>
+            <a:ext cx="1554480" cy="475488"/>
+          </a:xfrm>
+          <a:prstGeom prst="rect">
+            <a:avLst>
+              <a:gd name="adj" fmla="val 9615"/>
+            </a:avLst>
+          </a:prstGeom>
+          <a:solidFill>
+            <a:srgbClr val="FFFFFF"/>
+          </a:solidFill>
+          <a:ln w="12700">
+            <a:solidFill>
+              <a:srgbClr val="0D9488"/>
+            </a:solidFill>
+            <a:prstDash val="solid"/>
+          </a:ln>
+        </p:spPr>
+      </p:sp>
+      <p:sp>
+        <p:nvSpPr>
+          <p:cNvPr id="39" name="Text 37"/>
+          <p:cNvSpPr/>
+          <p:nvPr/>
+        </p:nvSpPr>
+        <p:spPr>
+          <a:xfrm>
+            <a:off x="6858000" y="3364992"/>
+            <a:ext cx="1554480" cy="475488"/>
+          </a:xfrm>
+          <a:prstGeom prst="rect">
+            <a:avLst/>
+          </a:prstGeom>
+          <a:noFill/>
+          <a:ln/>
+        </p:spPr>
+        <p:txBody>
+          <a:bodyPr wrap="square" lIns="0" tIns="0" rIns="0" bIns="0" rtlCol="0" anchor="ctr"/>
+          <a:lstStyle/>
+          <a:p>
+            <a:pPr algn="ctr" indent="0" marL="0">
+              <a:buNone/>
+            </a:pPr>
+            <a:r>
+              <a:rPr lang="en-US" sz="1400" b="1" dirty="0">
+                <a:solidFill>
+                  <a:srgbClr val="0D9488"/>
+                </a:solidFill>
+                <a:latin typeface="Trebuchet MS" pitchFamily="34" charset="0"/>
+                <a:ea typeface="Trebuchet MS" pitchFamily="34" charset="-122"/>
+                <a:cs typeface="Trebuchet MS" pitchFamily="34" charset="-120"/>
+              </a:rPr>
+              <a:t>ble</a:t>
+            </a:r>
+            <a:endParaRPr lang="en-US" sz="1400" dirty="0"/>
+          </a:p>
+        </p:txBody>
+      </p:sp>
+      <p:sp>
+        <p:nvSpPr>
+          <p:cNvPr id="40" name="Shape 38"/>
           <p:cNvSpPr/>
           <p:nvPr/>
         </p:nvSpPr>
@@ -27651,7 +27768,7 @@
       </p:sp>
       <p:sp>
         <p:nvSpPr>
-          <p:cNvPr id="37" name="Text 35"/>
+          <p:cNvPr id="41" name="Text 39"/>
           <p:cNvSpPr/>
           <p:nvPr/>
         </p:nvSpPr>
@@ -27690,7 +27807,7 @@
       </p:sp>
       <p:sp>
         <p:nvSpPr>
-          <p:cNvPr id="38" name="Shape 36"/>
+          <p:cNvPr id="42" name="Shape 40"/>
           <p:cNvSpPr/>
           <p:nvPr/>
         </p:nvSpPr>
@@ -27717,7 +27834,7 @@
       </p:sp>
       <p:sp>
         <p:nvSpPr>
-          <p:cNvPr id="39" name="Text 37"/>
+          <p:cNvPr id="43" name="Text 41"/>
           <p:cNvSpPr/>
           <p:nvPr/>
         </p:nvSpPr>
@@ -28179,7 +28296,7 @@
                 <a:ea typeface="Trebuchet MS" pitchFamily="34" charset="-122"/>
                 <a:cs typeface="Trebuchet MS" pitchFamily="34" charset="-120"/>
               </a:rPr>
-              <a:t>remover</a:t>
+              <a:t>removable</a:t>
             </a:r>
             <a:endParaRPr lang="en-US" sz="2800" dirty="0"/>
           </a:p>
@@ -28357,7 +28474,7 @@
                 <a:ea typeface="Calibri" pitchFamily="34" charset="-122"/>
                 <a:cs typeface="Calibri" pitchFamily="34" charset="-120"/>
               </a:rPr>
-              <a:t>again, back</a:t>
+              <a:t>back, again</a:t>
             </a:r>
             <a:endParaRPr lang="en-US" sz="850" dirty="0"/>
           </a:p>
@@ -28542,7 +28659,7 @@
                 <a:ea typeface="Trebuchet MS" pitchFamily="34" charset="-122"/>
                 <a:cs typeface="Trebuchet MS" pitchFamily="34" charset="-120"/>
               </a:rPr>
-              <a:t>er</a:t>
+              <a:t>able</a:t>
             </a:r>
             <a:endParaRPr lang="en-US" sz="1300" dirty="0"/>
           </a:p>
@@ -28581,7 +28698,7 @@
                 <a:ea typeface="Calibri" pitchFamily="34" charset="-122"/>
                 <a:cs typeface="Calibri" pitchFamily="34" charset="-120"/>
               </a:rPr>
-              <a:t>one who, something that</a:t>
+              <a:t>able to be</a:t>
             </a:r>
             <a:endParaRPr lang="en-US" sz="850" dirty="0"/>
           </a:p>
@@ -28589,7 +28706,46 @@
       </p:sp>
       <p:sp>
         <p:nvSpPr>
-          <p:cNvPr id="25" name="Shape 23"/>
+          <p:cNvPr id="25" name="Text 23"/>
+          <p:cNvSpPr/>
+          <p:nvPr/>
+        </p:nvSpPr>
+        <p:spPr>
+          <a:xfrm>
+            <a:off x="6519672" y="2752344"/>
+            <a:ext cx="1828800" cy="182880"/>
+          </a:xfrm>
+          <a:prstGeom prst="rect">
+            <a:avLst/>
+          </a:prstGeom>
+          <a:noFill/>
+          <a:ln/>
+        </p:spPr>
+        <p:txBody>
+          <a:bodyPr wrap="square" lIns="0" tIns="0" rIns="0" bIns="0" rtlCol="0" anchor="t"/>
+          <a:lstStyle/>
+          <a:p>
+            <a:pPr algn="ctr" indent="0" marL="0">
+              <a:buNone/>
+            </a:pPr>
+            <a:r>
+              <a:rPr lang="en-US" sz="700" i="1" dirty="0">
+                <a:solidFill>
+                  <a:srgbClr val="94A3B8"/>
+                </a:solidFill>
+                <a:latin typeface="Calibri" pitchFamily="34" charset="0"/>
+                <a:ea typeface="Calibri" pitchFamily="34" charset="-122"/>
+                <a:cs typeface="Calibri" pitchFamily="34" charset="-120"/>
+              </a:rPr>
+              <a:t>'e' dropped before vowel suffix</a:t>
+            </a:r>
+            <a:endParaRPr lang="en-US" sz="700" dirty="0"/>
+          </a:p>
+        </p:txBody>
+      </p:sp>
+      <p:sp>
+        <p:nvSpPr>
+          <p:cNvPr id="26" name="Shape 24"/>
           <p:cNvSpPr/>
           <p:nvPr/>
         </p:nvSpPr>
@@ -28616,7 +28772,7 @@
       </p:sp>
       <p:sp>
         <p:nvSpPr>
-          <p:cNvPr id="26" name="Text 24"/>
+          <p:cNvPr id="27" name="Text 25"/>
           <p:cNvSpPr/>
           <p:nvPr/>
         </p:nvSpPr>
@@ -28655,7 +28811,7 @@
       </p:sp>
       <p:sp>
         <p:nvSpPr>
-          <p:cNvPr id="27" name="Shape 25"/>
+          <p:cNvPr id="28" name="Shape 26"/>
           <p:cNvSpPr/>
           <p:nvPr/>
         </p:nvSpPr>
@@ -28682,14 +28838,14 @@
       </p:sp>
       <p:sp>
         <p:nvSpPr>
-          <p:cNvPr id="28" name="Shape 26"/>
-          <p:cNvSpPr/>
-          <p:nvPr/>
-        </p:nvSpPr>
-        <p:spPr>
-          <a:xfrm>
-            <a:off x="2313432" y="3364992"/>
-            <a:ext cx="1645920" cy="475488"/>
+          <p:cNvPr id="29" name="Shape 27"/>
+          <p:cNvSpPr/>
+          <p:nvPr/>
+        </p:nvSpPr>
+        <p:spPr>
+          <a:xfrm>
+            <a:off x="1975104" y="3364992"/>
+            <a:ext cx="1554480" cy="475488"/>
           </a:xfrm>
           <a:prstGeom prst="rect">
             <a:avLst>
@@ -28709,14 +28865,14 @@
       </p:sp>
       <p:sp>
         <p:nvSpPr>
-          <p:cNvPr id="29" name="Text 27"/>
-          <p:cNvSpPr/>
-          <p:nvPr/>
-        </p:nvSpPr>
-        <p:spPr>
-          <a:xfrm>
-            <a:off x="2313432" y="3364992"/>
-            <a:ext cx="1645920" cy="475488"/>
+          <p:cNvPr id="30" name="Text 28"/>
+          <p:cNvSpPr/>
+          <p:nvPr/>
+        </p:nvSpPr>
+        <p:spPr>
+          <a:xfrm>
+            <a:off x="1975104" y="3364992"/>
+            <a:ext cx="1554480" cy="475488"/>
           </a:xfrm>
           <a:prstGeom prst="rect">
             <a:avLst/>
@@ -28748,14 +28904,14 @@
       </p:sp>
       <p:sp>
         <p:nvSpPr>
-          <p:cNvPr id="30" name="Text 28"/>
-          <p:cNvSpPr/>
-          <p:nvPr/>
-        </p:nvSpPr>
-        <p:spPr>
-          <a:xfrm>
-            <a:off x="3959352" y="3364992"/>
-            <a:ext cx="411480" cy="475488"/>
+          <p:cNvPr id="31" name="Text 29"/>
+          <p:cNvSpPr/>
+          <p:nvPr/>
+        </p:nvSpPr>
+        <p:spPr>
+          <a:xfrm>
+            <a:off x="3529584" y="3364992"/>
+            <a:ext cx="73152" cy="475488"/>
           </a:xfrm>
           <a:prstGeom prst="rect">
             <a:avLst/>
@@ -28787,14 +28943,14 @@
       </p:sp>
       <p:sp>
         <p:nvSpPr>
-          <p:cNvPr id="31" name="Shape 29"/>
-          <p:cNvSpPr/>
-          <p:nvPr/>
-        </p:nvSpPr>
-        <p:spPr>
-          <a:xfrm>
-            <a:off x="4370832" y="3364992"/>
-            <a:ext cx="1645920" cy="475488"/>
+          <p:cNvPr id="32" name="Shape 30"/>
+          <p:cNvSpPr/>
+          <p:nvPr/>
+        </p:nvSpPr>
+        <p:spPr>
+          <a:xfrm>
+            <a:off x="3602736" y="3364992"/>
+            <a:ext cx="1554480" cy="475488"/>
           </a:xfrm>
           <a:prstGeom prst="rect">
             <a:avLst>
@@ -28814,14 +28970,14 @@
       </p:sp>
       <p:sp>
         <p:nvSpPr>
-          <p:cNvPr id="32" name="Text 30"/>
-          <p:cNvSpPr/>
-          <p:nvPr/>
-        </p:nvSpPr>
-        <p:spPr>
-          <a:xfrm>
-            <a:off x="4370832" y="3364992"/>
-            <a:ext cx="1645920" cy="475488"/>
+          <p:cNvPr id="33" name="Text 31"/>
+          <p:cNvSpPr/>
+          <p:nvPr/>
+        </p:nvSpPr>
+        <p:spPr>
+          <a:xfrm>
+            <a:off x="3602736" y="3364992"/>
+            <a:ext cx="1554480" cy="475488"/>
           </a:xfrm>
           <a:prstGeom prst="rect">
             <a:avLst/>
@@ -28853,14 +29009,14 @@
       </p:sp>
       <p:sp>
         <p:nvSpPr>
-          <p:cNvPr id="33" name="Text 31"/>
-          <p:cNvSpPr/>
-          <p:nvPr/>
-        </p:nvSpPr>
-        <p:spPr>
-          <a:xfrm>
-            <a:off x="6016752" y="3364992"/>
-            <a:ext cx="411480" cy="475488"/>
+          <p:cNvPr id="34" name="Text 32"/>
+          <p:cNvSpPr/>
+          <p:nvPr/>
+        </p:nvSpPr>
+        <p:spPr>
+          <a:xfrm>
+            <a:off x="5157216" y="3364992"/>
+            <a:ext cx="73152" cy="475488"/>
           </a:xfrm>
           <a:prstGeom prst="rect">
             <a:avLst/>
@@ -28892,14 +29048,14 @@
       </p:sp>
       <p:sp>
         <p:nvSpPr>
-          <p:cNvPr id="34" name="Shape 32"/>
-          <p:cNvSpPr/>
-          <p:nvPr/>
-        </p:nvSpPr>
-        <p:spPr>
-          <a:xfrm>
-            <a:off x="6428232" y="3364992"/>
-            <a:ext cx="1645920" cy="475488"/>
+          <p:cNvPr id="35" name="Shape 33"/>
+          <p:cNvSpPr/>
+          <p:nvPr/>
+        </p:nvSpPr>
+        <p:spPr>
+          <a:xfrm>
+            <a:off x="5230368" y="3364992"/>
+            <a:ext cx="1554480" cy="475488"/>
           </a:xfrm>
           <a:prstGeom prst="rect">
             <a:avLst>
@@ -28919,14 +29075,14 @@
       </p:sp>
       <p:sp>
         <p:nvSpPr>
-          <p:cNvPr id="35" name="Text 33"/>
-          <p:cNvSpPr/>
-          <p:nvPr/>
-        </p:nvSpPr>
-        <p:spPr>
-          <a:xfrm>
-            <a:off x="6428232" y="3364992"/>
-            <a:ext cx="1645920" cy="475488"/>
+          <p:cNvPr id="36" name="Text 34"/>
+          <p:cNvSpPr/>
+          <p:nvPr/>
+        </p:nvSpPr>
+        <p:spPr>
+          <a:xfrm>
+            <a:off x="5230368" y="3364992"/>
+            <a:ext cx="1554480" cy="475488"/>
           </a:xfrm>
           <a:prstGeom prst="rect">
             <a:avLst/>
@@ -28950,7 +29106,7 @@
                 <a:ea typeface="Trebuchet MS" pitchFamily="34" charset="-122"/>
                 <a:cs typeface="Trebuchet MS" pitchFamily="34" charset="-120"/>
               </a:rPr>
-              <a:t>er</a:t>
+              <a:t>a</a:t>
             </a:r>
             <a:endParaRPr lang="en-US" sz="1400" dirty="0"/>
           </a:p>
@@ -28958,7 +29114,112 @@
       </p:sp>
       <p:sp>
         <p:nvSpPr>
-          <p:cNvPr id="36" name="Shape 34"/>
+          <p:cNvPr id="37" name="Text 35"/>
+          <p:cNvSpPr/>
+          <p:nvPr/>
+        </p:nvSpPr>
+        <p:spPr>
+          <a:xfrm>
+            <a:off x="6784848" y="3364992"/>
+            <a:ext cx="73152" cy="475488"/>
+          </a:xfrm>
+          <a:prstGeom prst="rect">
+            <a:avLst/>
+          </a:prstGeom>
+          <a:noFill/>
+          <a:ln/>
+        </p:spPr>
+        <p:txBody>
+          <a:bodyPr wrap="square" lIns="0" tIns="0" rIns="0" bIns="0" rtlCol="0" anchor="ctr"/>
+          <a:lstStyle/>
+          <a:p>
+            <a:pPr algn="ctr" indent="0" marL="0">
+              <a:buNone/>
+            </a:pPr>
+            <a:r>
+              <a:rPr lang="en-US" sz="1600" b="1" dirty="0">
+                <a:solidFill>
+                  <a:srgbClr val="0D9488"/>
+                </a:solidFill>
+                <a:latin typeface="Trebuchet MS" pitchFamily="34" charset="0"/>
+                <a:ea typeface="Trebuchet MS" pitchFamily="34" charset="-122"/>
+                <a:cs typeface="Trebuchet MS" pitchFamily="34" charset="-120"/>
+              </a:rPr>
+              <a:t>·</a:t>
+            </a:r>
+            <a:endParaRPr lang="en-US" sz="1600" dirty="0"/>
+          </a:p>
+        </p:txBody>
+      </p:sp>
+      <p:sp>
+        <p:nvSpPr>
+          <p:cNvPr id="38" name="Shape 36"/>
+          <p:cNvSpPr/>
+          <p:nvPr/>
+        </p:nvSpPr>
+        <p:spPr>
+          <a:xfrm>
+            <a:off x="6858000" y="3364992"/>
+            <a:ext cx="1554480" cy="475488"/>
+          </a:xfrm>
+          <a:prstGeom prst="rect">
+            <a:avLst>
+              <a:gd name="adj" fmla="val 9615"/>
+            </a:avLst>
+          </a:prstGeom>
+          <a:solidFill>
+            <a:srgbClr val="FFFFFF"/>
+          </a:solidFill>
+          <a:ln w="12700">
+            <a:solidFill>
+              <a:srgbClr val="0D9488"/>
+            </a:solidFill>
+            <a:prstDash val="solid"/>
+          </a:ln>
+        </p:spPr>
+      </p:sp>
+      <p:sp>
+        <p:nvSpPr>
+          <p:cNvPr id="39" name="Text 37"/>
+          <p:cNvSpPr/>
+          <p:nvPr/>
+        </p:nvSpPr>
+        <p:spPr>
+          <a:xfrm>
+            <a:off x="6858000" y="3364992"/>
+            <a:ext cx="1554480" cy="475488"/>
+          </a:xfrm>
+          <a:prstGeom prst="rect">
+            <a:avLst/>
+          </a:prstGeom>
+          <a:noFill/>
+          <a:ln/>
+        </p:spPr>
+        <p:txBody>
+          <a:bodyPr wrap="square" lIns="0" tIns="0" rIns="0" bIns="0" rtlCol="0" anchor="ctr"/>
+          <a:lstStyle/>
+          <a:p>
+            <a:pPr algn="ctr" indent="0" marL="0">
+              <a:buNone/>
+            </a:pPr>
+            <a:r>
+              <a:rPr lang="en-US" sz="1400" b="1" dirty="0">
+                <a:solidFill>
+                  <a:srgbClr val="0D9488"/>
+                </a:solidFill>
+                <a:latin typeface="Trebuchet MS" pitchFamily="34" charset="0"/>
+                <a:ea typeface="Trebuchet MS" pitchFamily="34" charset="-122"/>
+                <a:cs typeface="Trebuchet MS" pitchFamily="34" charset="-120"/>
+              </a:rPr>
+              <a:t>ble</a:t>
+            </a:r>
+            <a:endParaRPr lang="en-US" sz="1400" dirty="0"/>
+          </a:p>
+        </p:txBody>
+      </p:sp>
+      <p:sp>
+        <p:nvSpPr>
+          <p:cNvPr id="40" name="Shape 38"/>
           <p:cNvSpPr/>
           <p:nvPr/>
         </p:nvSpPr>
@@ -28985,7 +29246,7 @@
       </p:sp>
       <p:sp>
         <p:nvSpPr>
-          <p:cNvPr id="37" name="Text 35"/>
+          <p:cNvPr id="41" name="Text 39"/>
           <p:cNvSpPr/>
           <p:nvPr/>
         </p:nvSpPr>
@@ -29024,7 +29285,7 @@
       </p:sp>
       <p:sp>
         <p:nvSpPr>
-          <p:cNvPr id="38" name="Shape 36"/>
+          <p:cNvPr id="42" name="Shape 40"/>
           <p:cNvSpPr/>
           <p:nvPr/>
         </p:nvSpPr>
@@ -29051,13 +29312,13 @@
       </p:sp>
       <p:sp>
         <p:nvSpPr>
-          <p:cNvPr id="39" name="Shape 37"/>
-          <p:cNvSpPr/>
-          <p:nvPr/>
-        </p:nvSpPr>
-        <p:spPr>
-          <a:xfrm>
-            <a:off x="2254649" y="4169664"/>
+          <p:cNvPr id="43" name="Shape 41"/>
+          <p:cNvSpPr/>
+          <p:nvPr/>
+        </p:nvSpPr>
+        <p:spPr>
+          <a:xfrm>
+            <a:off x="2023872" y="4169664"/>
             <a:ext cx="685800" cy="475488"/>
           </a:xfrm>
           <a:prstGeom prst="rect">
@@ -29078,13 +29339,13 @@
       </p:sp>
       <p:sp>
         <p:nvSpPr>
-          <p:cNvPr id="40" name="Text 38"/>
-          <p:cNvSpPr/>
-          <p:nvPr/>
-        </p:nvSpPr>
-        <p:spPr>
-          <a:xfrm>
-            <a:off x="2254649" y="4169664"/>
+          <p:cNvPr id="44" name="Text 42"/>
+          <p:cNvSpPr/>
+          <p:nvPr/>
+        </p:nvSpPr>
+        <p:spPr>
+          <a:xfrm>
+            <a:off x="2023872" y="4169664"/>
             <a:ext cx="685800" cy="475488"/>
           </a:xfrm>
           <a:prstGeom prst="rect">
@@ -29117,13 +29378,13 @@
       </p:sp>
       <p:sp>
         <p:nvSpPr>
-          <p:cNvPr id="41" name="Shape 39"/>
-          <p:cNvSpPr/>
-          <p:nvPr/>
-        </p:nvSpPr>
-        <p:spPr>
-          <a:xfrm>
-            <a:off x="3293146" y="4169664"/>
+          <p:cNvPr id="45" name="Shape 43"/>
+          <p:cNvSpPr/>
+          <p:nvPr/>
+        </p:nvSpPr>
+        <p:spPr>
+          <a:xfrm>
+            <a:off x="2831592" y="4169664"/>
             <a:ext cx="685800" cy="475488"/>
           </a:xfrm>
           <a:prstGeom prst="rect">
@@ -29144,13 +29405,13 @@
       </p:sp>
       <p:sp>
         <p:nvSpPr>
-          <p:cNvPr id="42" name="Text 40"/>
-          <p:cNvSpPr/>
-          <p:nvPr/>
-        </p:nvSpPr>
-        <p:spPr>
-          <a:xfrm>
-            <a:off x="3293146" y="4169664"/>
+          <p:cNvPr id="46" name="Text 44"/>
+          <p:cNvSpPr/>
+          <p:nvPr/>
+        </p:nvSpPr>
+        <p:spPr>
+          <a:xfrm>
+            <a:off x="2831592" y="4169664"/>
             <a:ext cx="685800" cy="475488"/>
           </a:xfrm>
           <a:prstGeom prst="rect">
@@ -29183,13 +29444,13 @@
       </p:sp>
       <p:sp>
         <p:nvSpPr>
-          <p:cNvPr id="43" name="Shape 41"/>
-          <p:cNvSpPr/>
-          <p:nvPr/>
-        </p:nvSpPr>
-        <p:spPr>
-          <a:xfrm>
-            <a:off x="4331643" y="4169664"/>
+          <p:cNvPr id="47" name="Shape 45"/>
+          <p:cNvSpPr/>
+          <p:nvPr/>
+        </p:nvSpPr>
+        <p:spPr>
+          <a:xfrm>
+            <a:off x="3639312" y="4169664"/>
             <a:ext cx="685800" cy="475488"/>
           </a:xfrm>
           <a:prstGeom prst="rect">
@@ -29210,13 +29471,13 @@
       </p:sp>
       <p:sp>
         <p:nvSpPr>
-          <p:cNvPr id="44" name="Text 42"/>
-          <p:cNvSpPr/>
-          <p:nvPr/>
-        </p:nvSpPr>
-        <p:spPr>
-          <a:xfrm>
-            <a:off x="4331643" y="4169664"/>
+          <p:cNvPr id="48" name="Text 46"/>
+          <p:cNvSpPr/>
+          <p:nvPr/>
+        </p:nvSpPr>
+        <p:spPr>
+          <a:xfrm>
+            <a:off x="3639312" y="4169664"/>
             <a:ext cx="685800" cy="475488"/>
           </a:xfrm>
           <a:prstGeom prst="rect">
@@ -29249,13 +29510,13 @@
       </p:sp>
       <p:sp>
         <p:nvSpPr>
-          <p:cNvPr id="45" name="Shape 43"/>
-          <p:cNvSpPr/>
-          <p:nvPr/>
-        </p:nvSpPr>
-        <p:spPr>
-          <a:xfrm>
-            <a:off x="5370141" y="4169664"/>
+          <p:cNvPr id="49" name="Shape 47"/>
+          <p:cNvSpPr/>
+          <p:nvPr/>
+        </p:nvSpPr>
+        <p:spPr>
+          <a:xfrm>
+            <a:off x="4447032" y="4169664"/>
             <a:ext cx="685800" cy="475488"/>
           </a:xfrm>
           <a:prstGeom prst="rect">
@@ -29276,13 +29537,13 @@
       </p:sp>
       <p:sp>
         <p:nvSpPr>
-          <p:cNvPr id="46" name="Text 44"/>
-          <p:cNvSpPr/>
-          <p:nvPr/>
-        </p:nvSpPr>
-        <p:spPr>
-          <a:xfrm>
-            <a:off x="5370141" y="4169664"/>
+          <p:cNvPr id="50" name="Text 48"/>
+          <p:cNvSpPr/>
+          <p:nvPr/>
+        </p:nvSpPr>
+        <p:spPr>
+          <a:xfrm>
+            <a:off x="4447032" y="4169664"/>
             <a:ext cx="685800" cy="475488"/>
           </a:xfrm>
           <a:prstGeom prst="rect">
@@ -29315,13 +29576,13 @@
       </p:sp>
       <p:sp>
         <p:nvSpPr>
-          <p:cNvPr id="47" name="Shape 45"/>
-          <p:cNvSpPr/>
-          <p:nvPr/>
-        </p:nvSpPr>
-        <p:spPr>
-          <a:xfrm>
-            <a:off x="6408638" y="4169664"/>
+          <p:cNvPr id="51" name="Shape 49"/>
+          <p:cNvSpPr/>
+          <p:nvPr/>
+        </p:nvSpPr>
+        <p:spPr>
+          <a:xfrm>
+            <a:off x="5254752" y="4169664"/>
             <a:ext cx="685800" cy="475488"/>
           </a:xfrm>
           <a:prstGeom prst="rect">
@@ -29342,13 +29603,13 @@
       </p:sp>
       <p:sp>
         <p:nvSpPr>
-          <p:cNvPr id="48" name="Text 46"/>
-          <p:cNvSpPr/>
-          <p:nvPr/>
-        </p:nvSpPr>
-        <p:spPr>
-          <a:xfrm>
-            <a:off x="6408638" y="4169664"/>
+          <p:cNvPr id="52" name="Text 50"/>
+          <p:cNvSpPr/>
+          <p:nvPr/>
+        </p:nvSpPr>
+        <p:spPr>
+          <a:xfrm>
+            <a:off x="5254752" y="4169664"/>
             <a:ext cx="685800" cy="475488"/>
           </a:xfrm>
           <a:prstGeom prst="rect">
@@ -29381,13 +29642,13 @@
       </p:sp>
       <p:sp>
         <p:nvSpPr>
-          <p:cNvPr id="49" name="Shape 47"/>
-          <p:cNvSpPr/>
-          <p:nvPr/>
-        </p:nvSpPr>
-        <p:spPr>
-          <a:xfrm>
-            <a:off x="7447135" y="4169664"/>
+          <p:cNvPr id="53" name="Shape 51"/>
+          <p:cNvSpPr/>
+          <p:nvPr/>
+        </p:nvSpPr>
+        <p:spPr>
+          <a:xfrm>
+            <a:off x="6062472" y="4169664"/>
             <a:ext cx="685800" cy="475488"/>
           </a:xfrm>
           <a:prstGeom prst="rect">
@@ -29408,13 +29669,13 @@
       </p:sp>
       <p:sp>
         <p:nvSpPr>
-          <p:cNvPr id="50" name="Text 48"/>
-          <p:cNvSpPr/>
-          <p:nvPr/>
-        </p:nvSpPr>
-        <p:spPr>
-          <a:xfrm>
-            <a:off x="7447135" y="4169664"/>
+          <p:cNvPr id="54" name="Text 52"/>
+          <p:cNvSpPr/>
+          <p:nvPr/>
+        </p:nvSpPr>
+        <p:spPr>
+          <a:xfrm>
+            <a:off x="6062472" y="4169664"/>
             <a:ext cx="685800" cy="475488"/>
           </a:xfrm>
           <a:prstGeom prst="rect">
@@ -29439,7 +29700,139 @@
                 <a:ea typeface="Trebuchet MS" pitchFamily="34" charset="-122"/>
                 <a:cs typeface="Trebuchet MS" pitchFamily="34" charset="-120"/>
               </a:rPr>
-              <a:t>er</a:t>
+              <a:t>a</a:t>
+            </a:r>
+            <a:endParaRPr lang="en-US" sz="900" dirty="0"/>
+          </a:p>
+        </p:txBody>
+      </p:sp>
+      <p:sp>
+        <p:nvSpPr>
+          <p:cNvPr id="55" name="Shape 53"/>
+          <p:cNvSpPr/>
+          <p:nvPr/>
+        </p:nvSpPr>
+        <p:spPr>
+          <a:xfrm>
+            <a:off x="6870192" y="4169664"/>
+            <a:ext cx="685800" cy="475488"/>
+          </a:xfrm>
+          <a:prstGeom prst="rect">
+            <a:avLst>
+              <a:gd name="adj" fmla="val 7692"/>
+            </a:avLst>
+          </a:prstGeom>
+          <a:solidFill>
+            <a:srgbClr val="FFFFFF"/>
+          </a:solidFill>
+          <a:ln w="12700">
+            <a:solidFill>
+              <a:srgbClr val="DB2777"/>
+            </a:solidFill>
+            <a:prstDash val="solid"/>
+          </a:ln>
+        </p:spPr>
+      </p:sp>
+      <p:sp>
+        <p:nvSpPr>
+          <p:cNvPr id="56" name="Text 54"/>
+          <p:cNvSpPr/>
+          <p:nvPr/>
+        </p:nvSpPr>
+        <p:spPr>
+          <a:xfrm>
+            <a:off x="6870192" y="4169664"/>
+            <a:ext cx="685800" cy="475488"/>
+          </a:xfrm>
+          <a:prstGeom prst="rect">
+            <a:avLst/>
+          </a:prstGeom>
+          <a:noFill/>
+          <a:ln/>
+        </p:spPr>
+        <p:txBody>
+          <a:bodyPr wrap="square" lIns="0" tIns="0" rIns="0" bIns="0" rtlCol="0" anchor="ctr"/>
+          <a:lstStyle/>
+          <a:p>
+            <a:pPr algn="ctr" indent="0" marL="0">
+              <a:buNone/>
+            </a:pPr>
+            <a:r>
+              <a:rPr lang="en-US" sz="900" b="1" dirty="0">
+                <a:solidFill>
+                  <a:srgbClr val="9D174D"/>
+                </a:solidFill>
+                <a:latin typeface="Trebuchet MS" pitchFamily="34" charset="0"/>
+                <a:ea typeface="Trebuchet MS" pitchFamily="34" charset="-122"/>
+                <a:cs typeface="Trebuchet MS" pitchFamily="34" charset="-120"/>
+              </a:rPr>
+              <a:t>b</a:t>
+            </a:r>
+            <a:endParaRPr lang="en-US" sz="900" dirty="0"/>
+          </a:p>
+        </p:txBody>
+      </p:sp>
+      <p:sp>
+        <p:nvSpPr>
+          <p:cNvPr id="57" name="Shape 55"/>
+          <p:cNvSpPr/>
+          <p:nvPr/>
+        </p:nvSpPr>
+        <p:spPr>
+          <a:xfrm>
+            <a:off x="7677912" y="4169664"/>
+            <a:ext cx="685800" cy="475488"/>
+          </a:xfrm>
+          <a:prstGeom prst="rect">
+            <a:avLst>
+              <a:gd name="adj" fmla="val 7692"/>
+            </a:avLst>
+          </a:prstGeom>
+          <a:solidFill>
+            <a:srgbClr val="FFFFFF"/>
+          </a:solidFill>
+          <a:ln w="12700">
+            <a:solidFill>
+              <a:srgbClr val="DB2777"/>
+            </a:solidFill>
+            <a:prstDash val="solid"/>
+          </a:ln>
+        </p:spPr>
+      </p:sp>
+      <p:sp>
+        <p:nvSpPr>
+          <p:cNvPr id="58" name="Text 56"/>
+          <p:cNvSpPr/>
+          <p:nvPr/>
+        </p:nvSpPr>
+        <p:spPr>
+          <a:xfrm>
+            <a:off x="7677912" y="4169664"/>
+            <a:ext cx="685800" cy="475488"/>
+          </a:xfrm>
+          <a:prstGeom prst="rect">
+            <a:avLst/>
+          </a:prstGeom>
+          <a:noFill/>
+          <a:ln/>
+        </p:spPr>
+        <p:txBody>
+          <a:bodyPr wrap="square" lIns="0" tIns="0" rIns="0" bIns="0" rtlCol="0" anchor="ctr"/>
+          <a:lstStyle/>
+          <a:p>
+            <a:pPr algn="ctr" indent="0" marL="0">
+              <a:buNone/>
+            </a:pPr>
+            <a:r>
+              <a:rPr lang="en-US" sz="900" b="1" dirty="0">
+                <a:solidFill>
+                  <a:srgbClr val="9D174D"/>
+                </a:solidFill>
+                <a:latin typeface="Trebuchet MS" pitchFamily="34" charset="0"/>
+                <a:ea typeface="Trebuchet MS" pitchFamily="34" charset="-122"/>
+                <a:cs typeface="Trebuchet MS" pitchFamily="34" charset="-120"/>
+              </a:rPr>
+              <a:t>le</a:t>
             </a:r>
             <a:endParaRPr lang="en-US" sz="900" dirty="0"/>
           </a:p>
@@ -31026,7 +31419,7 @@
                 <a:ea typeface="Calibri" pitchFamily="34" charset="-122"/>
                 <a:cs typeface="Calibri" pitchFamily="34" charset="-120"/>
               </a:rPr>
-              <a:t>again, back</a:t>
+              <a:t>back, again</a:t>
             </a:r>
             <a:endParaRPr lang="en-US" sz="850" dirty="0"/>
           </a:p>
@@ -32313,7 +32706,7 @@
                 <a:ea typeface="Calibri" pitchFamily="34" charset="-122"/>
                 <a:cs typeface="Calibri" pitchFamily="34" charset="-120"/>
               </a:rPr>
-              <a:t>again, back</a:t>
+              <a:t>back, again</a:t>
             </a:r>
             <a:endParaRPr lang="en-US" sz="850" dirty="0"/>
           </a:p>
@@ -34047,7 +34440,7 @@
                 <a:ea typeface="Calibri" pitchFamily="34" charset="-122"/>
                 <a:cs typeface="Calibri" pitchFamily="34" charset="-120"/>
               </a:rPr>
-              <a:t>again, back</a:t>
+              <a:t>back, again</a:t>
             </a:r>
             <a:endParaRPr lang="en-US" sz="850" dirty="0"/>
           </a:p>
@@ -37532,7 +37925,7 @@
                 <a:ea typeface="Trebuchet MS" pitchFamily="34" charset="-122"/>
                 <a:cs typeface="Trebuchet MS" pitchFamily="34" charset="-120"/>
               </a:rPr>
-              <a:t>-al</a:t>
+              <a:t>-ed</a:t>
             </a:r>
             <a:endParaRPr lang="en-US" sz="1300" dirty="0"/>
           </a:p>
@@ -37685,7 +38078,7 @@
                 <a:ea typeface="Trebuchet MS" pitchFamily="34" charset="-122"/>
                 <a:cs typeface="Trebuchet MS" pitchFamily="34" charset="-120"/>
               </a:rPr>
-              <a:t>-able</a:t>
+              <a:t>-ing</a:t>
             </a:r>
             <a:endParaRPr lang="en-US" sz="1300" dirty="0"/>
           </a:p>
@@ -37838,7 +38231,7 @@
                 <a:ea typeface="Trebuchet MS" pitchFamily="34" charset="-122"/>
                 <a:cs typeface="Trebuchet MS" pitchFamily="34" charset="-120"/>
               </a:rPr>
-              <a:t>-ed</a:t>
+              <a:t>-al</a:t>
             </a:r>
             <a:endParaRPr lang="en-US" sz="1300" dirty="0"/>
           </a:p>
@@ -37991,7 +38384,7 @@
                 <a:ea typeface="Trebuchet MS" pitchFamily="34" charset="-122"/>
                 <a:cs typeface="Trebuchet MS" pitchFamily="34" charset="-120"/>
               </a:rPr>
-              <a:t>-ing</a:t>
+              <a:t>-able</a:t>
             </a:r>
             <a:endParaRPr lang="en-US" sz="1300" dirty="0"/>
           </a:p>
@@ -38055,7 +38448,7 @@
                 <a:ea typeface="Trebuchet MS" pitchFamily="34" charset="-122"/>
                 <a:cs typeface="Trebuchet MS" pitchFamily="34" charset="-120"/>
               </a:rPr>
-              <a:t>dis-</a:t>
+              <a:t>de-</a:t>
             </a:r>
             <a:endParaRPr lang="en-US" sz="1300" dirty="0"/>
           </a:p>
@@ -38315,7 +38708,7 @@
                 <a:ea typeface="Trebuchet MS" pitchFamily="34" charset="-122"/>
                 <a:cs typeface="Trebuchet MS" pitchFamily="34" charset="-120"/>
               </a:rPr>
-              <a:t>removal</a:t>
+              <a:t>removed</a:t>
             </a:r>
             <a:endParaRPr lang="en-US" sz="1200" dirty="0"/>
           </a:p>
@@ -38381,7 +38774,7 @@
                 <a:ea typeface="Trebuchet MS" pitchFamily="34" charset="-122"/>
                 <a:cs typeface="Trebuchet MS" pitchFamily="34" charset="-120"/>
               </a:rPr>
-              <a:t>removable</a:t>
+              <a:t>removing</a:t>
             </a:r>
             <a:endParaRPr lang="en-US" sz="1200" dirty="0"/>
           </a:p>
@@ -38447,7 +38840,7 @@
                 <a:ea typeface="Trebuchet MS" pitchFamily="34" charset="-122"/>
                 <a:cs typeface="Trebuchet MS" pitchFamily="34" charset="-120"/>
               </a:rPr>
-              <a:t>removed</a:t>
+              <a:t>removal</a:t>
             </a:r>
             <a:endParaRPr lang="en-US" sz="1200" dirty="0"/>
           </a:p>
@@ -38513,7 +38906,7 @@
                 <a:ea typeface="Trebuchet MS" pitchFamily="34" charset="-122"/>
                 <a:cs typeface="Trebuchet MS" pitchFamily="34" charset="-120"/>
               </a:rPr>
-              <a:t>removing</a:t>
+              <a:t>removable</a:t>
             </a:r>
             <a:endParaRPr lang="en-US" sz="1200" dirty="0"/>
           </a:p>
@@ -39899,7 +40292,7 @@
                 <a:ea typeface="Calibri" pitchFamily="34" charset="-122"/>
                 <a:cs typeface="Calibri" pitchFamily="34" charset="-120"/>
               </a:rPr>
-              <a:t>1.  The root 'remove' comes from the Latin word 'removere'.</a:t>
+              <a:t>1.  A 'remover' is something or someone that takes things away.</a:t>
             </a:r>
             <a:endParaRPr lang="en-US" sz="1300" dirty="0"/>
           </a:p>
@@ -40038,7 +40431,7 @@
                 <a:ea typeface="Calibri" pitchFamily="34" charset="-122"/>
                 <a:cs typeface="Calibri" pitchFamily="34" charset="-120"/>
               </a:rPr>
-              <a:t>2.  The word 'removable' means something that cannot be taken away.</a:t>
+              <a:t>2.  The root 'remove' comes from Greek.</a:t>
             </a:r>
             <a:endParaRPr lang="en-US" sz="1300" dirty="0"/>
           </a:p>
@@ -40177,7 +40570,7 @@
                 <a:ea typeface="Calibri" pitchFamily="34" charset="-122"/>
                 <a:cs typeface="Calibri" pitchFamily="34" charset="-120"/>
               </a:rPr>
-              <a:t>3.  Adding the suffix '-al' to 'remove' makes the word 'removal'.</a:t>
+              <a:t>3.  The word 'removal' contains the root 'remove'.</a:t>
             </a:r>
             <a:endParaRPr lang="en-US" sz="1300" dirty="0"/>
           </a:p>
@@ -40316,7 +40709,7 @@
                 <a:ea typeface="Calibri" pitchFamily="34" charset="-122"/>
                 <a:cs typeface="Calibri" pitchFamily="34" charset="-120"/>
               </a:rPr>
-              <a:t>4.  A 'remover' is a person or product that takes something away.</a:t>
+              <a:t>4.  The prefix 'ir' in 'irremovable' means 'not'.</a:t>
             </a:r>
             <a:endParaRPr lang="en-US" sz="1300" dirty="0"/>
           </a:p>
@@ -40455,7 +40848,7 @@
                 <a:ea typeface="Calibri" pitchFamily="34" charset="-122"/>
                 <a:cs typeface="Calibri" pitchFamily="34" charset="-120"/>
               </a:rPr>
-              <a:t>5.  The prefix 'ir-' in 'irremovable' means 'again'.</a:t>
+              <a:t>5.  'Removable' means something that cannot be taken away.</a:t>
             </a:r>
             <a:endParaRPr lang="en-US" sz="1300" dirty="0"/>
           </a:p>
@@ -41160,7 +41553,7 @@
                 <a:ea typeface="Trebuchet MS" pitchFamily="34" charset="-122"/>
                 <a:cs typeface="Trebuchet MS" pitchFamily="34" charset="-120"/>
               </a:rPr>
-              <a:t>removal</a:t>
+              <a:t>removed</a:t>
             </a:r>
             <a:endParaRPr lang="en-US" sz="1300" dirty="0"/>
           </a:p>
@@ -41226,7 +41619,7 @@
                 <a:ea typeface="Trebuchet MS" pitchFamily="34" charset="-122"/>
                 <a:cs typeface="Trebuchet MS" pitchFamily="34" charset="-120"/>
               </a:rPr>
-              <a:t>removable</a:t>
+              <a:t>removing</a:t>
             </a:r>
             <a:endParaRPr lang="en-US" sz="1300" dirty="0"/>
           </a:p>
@@ -41292,7 +41685,7 @@
                 <a:ea typeface="Trebuchet MS" pitchFamily="34" charset="-122"/>
                 <a:cs typeface="Trebuchet MS" pitchFamily="34" charset="-120"/>
               </a:rPr>
-              <a:t>removed</a:t>
+              <a:t>removal</a:t>
             </a:r>
             <a:endParaRPr lang="en-US" sz="1300" dirty="0"/>
           </a:p>
@@ -41358,7 +41751,7 @@
                 <a:ea typeface="Trebuchet MS" pitchFamily="34" charset="-122"/>
                 <a:cs typeface="Trebuchet MS" pitchFamily="34" charset="-120"/>
               </a:rPr>
-              <a:t>removing</a:t>
+              <a:t>removable</a:t>
             </a:r>
             <a:endParaRPr lang="en-US" sz="1300" dirty="0"/>
           </a:p>
@@ -42211,7 +42604,7 @@
                 <a:ea typeface="Trebuchet MS" pitchFamily="34" charset="-122"/>
                 <a:cs typeface="Trebuchet MS" pitchFamily="34" charset="-120"/>
               </a:rPr>
-              <a:t>-al</a:t>
+              <a:t>-ed</a:t>
             </a:r>
             <a:endParaRPr lang="en-US" sz="1300" dirty="0"/>
           </a:p>
@@ -42364,7 +42757,7 @@
                 <a:ea typeface="Trebuchet MS" pitchFamily="34" charset="-122"/>
                 <a:cs typeface="Trebuchet MS" pitchFamily="34" charset="-120"/>
               </a:rPr>
-              <a:t>-able</a:t>
+              <a:t>-ing</a:t>
             </a:r>
             <a:endParaRPr lang="en-US" sz="1300" dirty="0"/>
           </a:p>
@@ -42517,7 +42910,7 @@
                 <a:ea typeface="Trebuchet MS" pitchFamily="34" charset="-122"/>
                 <a:cs typeface="Trebuchet MS" pitchFamily="34" charset="-120"/>
               </a:rPr>
-              <a:t>-ed</a:t>
+              <a:t>-al</a:t>
             </a:r>
             <a:endParaRPr lang="en-US" sz="1300" dirty="0"/>
           </a:p>
@@ -42670,7 +43063,7 @@
                 <a:ea typeface="Trebuchet MS" pitchFamily="34" charset="-122"/>
                 <a:cs typeface="Trebuchet MS" pitchFamily="34" charset="-120"/>
               </a:rPr>
-              <a:t>-ing</a:t>
+              <a:t>-able</a:t>
             </a:r>
             <a:endParaRPr lang="en-US" sz="1300" dirty="0"/>
           </a:p>
@@ -42734,7 +43127,7 @@
                 <a:ea typeface="Trebuchet MS" pitchFamily="34" charset="-122"/>
                 <a:cs typeface="Trebuchet MS" pitchFamily="34" charset="-120"/>
               </a:rPr>
-              <a:t>dis-</a:t>
+              <a:t>de-</a:t>
             </a:r>
             <a:endParaRPr lang="en-US" sz="1300" dirty="0"/>
           </a:p>
@@ -43159,7 +43552,7 @@
                 <a:ea typeface="Trebuchet MS" pitchFamily="34" charset="-122"/>
                 <a:cs typeface="Trebuchet MS" pitchFamily="34" charset="-120"/>
               </a:rPr>
-              <a:t>-al</a:t>
+              <a:t>-ed</a:t>
             </a:r>
             <a:endParaRPr lang="en-US" sz="1300" dirty="0"/>
           </a:p>
@@ -43734,7 +44127,7 @@
                 <a:ea typeface="Calibri" pitchFamily="34" charset="-122"/>
                 <a:cs typeface="Calibri" pitchFamily="34" charset="-120"/>
               </a:rPr>
-              <a:t>The action of taking something away right now.</a:t>
+              <a:t>Able to be taken off or taken away.</a:t>
             </a:r>
             <a:endParaRPr lang="en-US" sz="1200" dirty="0"/>
           </a:p>
@@ -43807,7 +44200,7 @@
                 <a:ea typeface="Trebuchet MS" pitchFamily="34" charset="-122"/>
                 <a:cs typeface="Trebuchet MS" pitchFamily="34" charset="-120"/>
               </a:rPr>
-              <a:t>removal</a:t>
+              <a:t>removed</a:t>
             </a:r>
             <a:endParaRPr lang="en-US" sz="1200" dirty="0"/>
           </a:p>
@@ -43873,7 +44266,7 @@
                 <a:ea typeface="Calibri" pitchFamily="34" charset="-122"/>
                 <a:cs typeface="Calibri" pitchFamily="34" charset="-120"/>
               </a:rPr>
-              <a:t>Something that has already been taken away.</a:t>
+              <a:t>The act of taking something away.</a:t>
             </a:r>
             <a:endParaRPr lang="en-US" sz="1200" dirty="0"/>
           </a:p>
@@ -43946,7 +44339,7 @@
                 <a:ea typeface="Trebuchet MS" pitchFamily="34" charset="-122"/>
                 <a:cs typeface="Trebuchet MS" pitchFamily="34" charset="-120"/>
               </a:rPr>
-              <a:t>removable</a:t>
+              <a:t>removing</a:t>
             </a:r>
             <a:endParaRPr lang="en-US" sz="1200" dirty="0"/>
           </a:p>
@@ -44012,7 +44405,7 @@
                 <a:ea typeface="Calibri" pitchFamily="34" charset="-122"/>
                 <a:cs typeface="Calibri" pitchFamily="34" charset="-120"/>
               </a:rPr>
-              <a:t>Something that can be taken away or lifted off.</a:t>
+              <a:t>In the process of taking something away.</a:t>
             </a:r>
             <a:endParaRPr lang="en-US" sz="1200" dirty="0"/>
           </a:p>
@@ -44085,7 +44478,7 @@
                 <a:ea typeface="Trebuchet MS" pitchFamily="34" charset="-122"/>
                 <a:cs typeface="Trebuchet MS" pitchFamily="34" charset="-120"/>
               </a:rPr>
-              <a:t>removed</a:t>
+              <a:t>removal</a:t>
             </a:r>
             <a:endParaRPr lang="en-US" sz="1200" dirty="0"/>
           </a:p>
@@ -44151,7 +44544,7 @@
                 <a:ea typeface="Calibri" pitchFamily="34" charset="-122"/>
                 <a:cs typeface="Calibri" pitchFamily="34" charset="-120"/>
               </a:rPr>
-              <a:t>Something that cannot be taken away or moved at all.</a:t>
+              <a:t>Not able to be taken away or moved.</a:t>
             </a:r>
             <a:endParaRPr lang="en-US" sz="1200" dirty="0"/>
           </a:p>
@@ -44224,7 +44617,7 @@
                 <a:ea typeface="Trebuchet MS" pitchFamily="34" charset="-122"/>
                 <a:cs typeface="Trebuchet MS" pitchFamily="34" charset="-120"/>
               </a:rPr>
-              <a:t>removing</a:t>
+              <a:t>removable</a:t>
             </a:r>
             <a:endParaRPr lang="en-US" sz="1200" dirty="0"/>
           </a:p>
@@ -44429,7 +44822,7 @@
                 <a:ea typeface="Calibri" pitchFamily="34" charset="-122"/>
                 <a:cs typeface="Calibri" pitchFamily="34" charset="-120"/>
               </a:rPr>
-              <a:t>A person or product that takes something away, like a stain remover.</a:t>
+              <a:t>A person or product that takes something away.</a:t>
             </a:r>
             <a:endParaRPr lang="en-US" sz="1200" dirty="0"/>
           </a:p>
@@ -44568,7 +44961,7 @@
                 <a:ea typeface="Calibri" pitchFamily="34" charset="-122"/>
                 <a:cs typeface="Calibri" pitchFamily="34" charset="-120"/>
               </a:rPr>
-              <a:t>The act of taking something away.</a:t>
+              <a:t>Taken away or moved from a place.</a:t>
             </a:r>
             <a:endParaRPr lang="en-US" sz="1200" dirty="0"/>
           </a:p>
@@ -45063,7 +45456,7 @@
                 <a:ea typeface="Calibri" pitchFamily="34" charset="-122"/>
                 <a:cs typeface="Calibri" pitchFamily="34" charset="-120"/>
               </a:rPr>
-              <a:t>The teacher asked the students to help with the removal of the old displays from the classroom wall.</a:t>
+              <a:t>The school caretaker organised the removal of the broken bench from the playground.</a:t>
             </a:r>
             <a:endParaRPr lang="en-US" sz="1500" dirty="0"/>
           </a:p>
@@ -45227,7 +45620,7 @@
                 <a:ea typeface="Calibri" pitchFamily="34" charset="-122"/>
                 <a:cs typeface="Calibri" pitchFamily="34" charset="-120"/>
               </a:rPr>
-              <a:t>Mia used a special remover to clean the paint stains from her school shirt.</a:t>
+              <a:t>Please make sure all removable stickers are taken off your books before you hand them in.</a:t>
             </a:r>
             <a:endParaRPr lang="en-US" sz="1500" dirty="0"/>
           </a:p>
@@ -45391,7 +45784,7 @@
                 <a:ea typeface="Calibri" pitchFamily="34" charset="-122"/>
                 <a:cs typeface="Calibri" pitchFamily="34" charset="-120"/>
               </a:rPr>
-              <a:t>The council decided that the fallen tree was irremovable without special equipment.</a:t>
+              <a:t>The dentist explained that removing a tooth is sometimes the best way to stop the pain.</a:t>
             </a:r>
             <a:endParaRPr lang="en-US" sz="1500" dirty="0"/>
           </a:p>

--- a/output/wordlabs-remove-3day.pptx
+++ b/output/wordlabs-remove-3day.pptx
@@ -11358,7 +11358,7 @@
                 <a:ea typeface="Trebuchet MS" pitchFamily="34" charset="-122"/>
                 <a:cs typeface="Trebuchet MS" pitchFamily="34" charset="-120"/>
               </a:rPr>
-              <a:t>oo</a:t>
+              <a:t>o</a:t>
             </a:r>
             <a:endParaRPr lang="en-US" sz="900" dirty="0"/>
           </a:p>
@@ -16638,7 +16638,7 @@
                 <a:ea typeface="Trebuchet MS" pitchFamily="34" charset="-122"/>
                 <a:cs typeface="Trebuchet MS" pitchFamily="34" charset="-120"/>
               </a:rPr>
-              <a:t>oo</a:t>
+              <a:t>o</a:t>
             </a:r>
             <a:endParaRPr lang="en-US" sz="900" dirty="0"/>
           </a:p>
@@ -23323,7 +23323,7 @@
         </p:nvSpPr>
         <p:spPr>
           <a:xfrm>
-            <a:off x="2254649" y="4169664"/>
+            <a:off x="2124837" y="4169664"/>
             <a:ext cx="685800" cy="475488"/>
           </a:xfrm>
           <a:prstGeom prst="rect">
@@ -23350,7 +23350,7 @@
         </p:nvSpPr>
         <p:spPr>
           <a:xfrm>
-            <a:off x="2254649" y="4169664"/>
+            <a:off x="2124837" y="4169664"/>
             <a:ext cx="685800" cy="475488"/>
           </a:xfrm>
           <a:prstGeom prst="rect">
@@ -23389,7 +23389,7 @@
         </p:nvSpPr>
         <p:spPr>
           <a:xfrm>
-            <a:off x="3293146" y="4169664"/>
+            <a:off x="3033522" y="4169664"/>
             <a:ext cx="685800" cy="475488"/>
           </a:xfrm>
           <a:prstGeom prst="rect">
@@ -23416,7 +23416,7 @@
         </p:nvSpPr>
         <p:spPr>
           <a:xfrm>
-            <a:off x="3293146" y="4169664"/>
+            <a:off x="3033522" y="4169664"/>
             <a:ext cx="685800" cy="475488"/>
           </a:xfrm>
           <a:prstGeom prst="rect">
@@ -23455,7 +23455,7 @@
         </p:nvSpPr>
         <p:spPr>
           <a:xfrm>
-            <a:off x="4331643" y="4169664"/>
+            <a:off x="3942207" y="4169664"/>
             <a:ext cx="685800" cy="475488"/>
           </a:xfrm>
           <a:prstGeom prst="rect">
@@ -23482,7 +23482,7 @@
         </p:nvSpPr>
         <p:spPr>
           <a:xfrm>
-            <a:off x="4331643" y="4169664"/>
+            <a:off x="3942207" y="4169664"/>
             <a:ext cx="685800" cy="475488"/>
           </a:xfrm>
           <a:prstGeom prst="rect">
@@ -23521,7 +23521,7 @@
         </p:nvSpPr>
         <p:spPr>
           <a:xfrm>
-            <a:off x="5370141" y="4169664"/>
+            <a:off x="4850892" y="4169664"/>
             <a:ext cx="685800" cy="475488"/>
           </a:xfrm>
           <a:prstGeom prst="rect">
@@ -23548,7 +23548,7 @@
         </p:nvSpPr>
         <p:spPr>
           <a:xfrm>
-            <a:off x="5370141" y="4169664"/>
+            <a:off x="4850892" y="4169664"/>
             <a:ext cx="685800" cy="475488"/>
           </a:xfrm>
           <a:prstGeom prst="rect">
@@ -23573,7 +23573,7 @@
                 <a:ea typeface="Trebuchet MS" pitchFamily="34" charset="-122"/>
                 <a:cs typeface="Trebuchet MS" pitchFamily="34" charset="-120"/>
               </a:rPr>
-              <a:t>oo</a:t>
+              <a:t>o</a:t>
             </a:r>
             <a:endParaRPr lang="en-US" sz="900" dirty="0"/>
           </a:p>
@@ -23587,7 +23587,7 @@
         </p:nvSpPr>
         <p:spPr>
           <a:xfrm>
-            <a:off x="6408638" y="4169664"/>
+            <a:off x="5759577" y="4169664"/>
             <a:ext cx="685800" cy="475488"/>
           </a:xfrm>
           <a:prstGeom prst="rect">
@@ -23614,7 +23614,7 @@
         </p:nvSpPr>
         <p:spPr>
           <a:xfrm>
-            <a:off x="6408638" y="4169664"/>
+            <a:off x="5759577" y="4169664"/>
             <a:ext cx="685800" cy="475488"/>
           </a:xfrm>
           <a:prstGeom prst="rect">
@@ -23653,7 +23653,7 @@
         </p:nvSpPr>
         <p:spPr>
           <a:xfrm>
-            <a:off x="7447135" y="4169664"/>
+            <a:off x="6668262" y="4169664"/>
             <a:ext cx="685800" cy="475488"/>
           </a:xfrm>
           <a:prstGeom prst="rect">
@@ -23680,7 +23680,7 @@
         </p:nvSpPr>
         <p:spPr>
           <a:xfrm>
-            <a:off x="7447135" y="4169664"/>
+            <a:off x="6668262" y="4169664"/>
             <a:ext cx="685800" cy="475488"/>
           </a:xfrm>
           <a:prstGeom prst="rect">
@@ -23705,7 +23705,73 @@
                 <a:ea typeface="Trebuchet MS" pitchFamily="34" charset="-122"/>
                 <a:cs typeface="Trebuchet MS" pitchFamily="34" charset="-120"/>
               </a:rPr>
-              <a:t>ing</a:t>
+              <a:t>i</a:t>
+            </a:r>
+            <a:endParaRPr lang="en-US" sz="900" dirty="0"/>
+          </a:p>
+        </p:txBody>
+      </p:sp>
+      <p:sp>
+        <p:nvSpPr>
+          <p:cNvPr id="52" name="Shape 50"/>
+          <p:cNvSpPr/>
+          <p:nvPr/>
+        </p:nvSpPr>
+        <p:spPr>
+          <a:xfrm>
+            <a:off x="7576947" y="4169664"/>
+            <a:ext cx="685800" cy="475488"/>
+          </a:xfrm>
+          <a:prstGeom prst="rect">
+            <a:avLst>
+              <a:gd name="adj" fmla="val 7692"/>
+            </a:avLst>
+          </a:prstGeom>
+          <a:solidFill>
+            <a:srgbClr val="FFFFFF"/>
+          </a:solidFill>
+          <a:ln w="12700">
+            <a:solidFill>
+              <a:srgbClr val="DB2777"/>
+            </a:solidFill>
+            <a:prstDash val="solid"/>
+          </a:ln>
+        </p:spPr>
+      </p:sp>
+      <p:sp>
+        <p:nvSpPr>
+          <p:cNvPr id="53" name="Text 51"/>
+          <p:cNvSpPr/>
+          <p:nvPr/>
+        </p:nvSpPr>
+        <p:spPr>
+          <a:xfrm>
+            <a:off x="7576947" y="4169664"/>
+            <a:ext cx="685800" cy="475488"/>
+          </a:xfrm>
+          <a:prstGeom prst="rect">
+            <a:avLst/>
+          </a:prstGeom>
+          <a:noFill/>
+          <a:ln/>
+        </p:spPr>
+        <p:txBody>
+          <a:bodyPr wrap="square" lIns="0" tIns="0" rIns="0" bIns="0" rtlCol="0" anchor="ctr"/>
+          <a:lstStyle/>
+          <a:p>
+            <a:pPr algn="ctr" indent="0" marL="0">
+              <a:buNone/>
+            </a:pPr>
+            <a:r>
+              <a:rPr lang="en-US" sz="900" b="1" dirty="0">
+                <a:solidFill>
+                  <a:srgbClr val="9D174D"/>
+                </a:solidFill>
+                <a:latin typeface="Trebuchet MS" pitchFamily="34" charset="0"/>
+                <a:ea typeface="Trebuchet MS" pitchFamily="34" charset="-122"/>
+                <a:cs typeface="Trebuchet MS" pitchFamily="34" charset="-120"/>
+              </a:rPr>
+              <a:t>ng</a:t>
             </a:r>
             <a:endParaRPr lang="en-US" sz="900" dirty="0"/>
           </a:p>
@@ -29318,8 +29384,8 @@
         </p:nvSpPr>
         <p:spPr>
           <a:xfrm>
-            <a:off x="2023872" y="4169664"/>
-            <a:ext cx="685800" cy="475488"/>
+            <a:off x="1951330" y="4169664"/>
+            <a:ext cx="676656" cy="475488"/>
           </a:xfrm>
           <a:prstGeom prst="rect">
             <a:avLst>
@@ -29345,8 +29411,8 @@
         </p:nvSpPr>
         <p:spPr>
           <a:xfrm>
-            <a:off x="2023872" y="4169664"/>
-            <a:ext cx="685800" cy="475488"/>
+            <a:off x="1951330" y="4169664"/>
+            <a:ext cx="676656" cy="475488"/>
           </a:xfrm>
           <a:prstGeom prst="rect">
             <a:avLst/>
@@ -29384,8 +29450,8 @@
         </p:nvSpPr>
         <p:spPr>
           <a:xfrm>
-            <a:off x="2831592" y="4169664"/>
-            <a:ext cx="685800" cy="475488"/>
+            <a:off x="2677363" y="4169664"/>
+            <a:ext cx="676656" cy="475488"/>
           </a:xfrm>
           <a:prstGeom prst="rect">
             <a:avLst>
@@ -29411,8 +29477,8 @@
         </p:nvSpPr>
         <p:spPr>
           <a:xfrm>
-            <a:off x="2831592" y="4169664"/>
-            <a:ext cx="685800" cy="475488"/>
+            <a:off x="2677363" y="4169664"/>
+            <a:ext cx="676656" cy="475488"/>
           </a:xfrm>
           <a:prstGeom prst="rect">
             <a:avLst/>
@@ -29450,8 +29516,8 @@
         </p:nvSpPr>
         <p:spPr>
           <a:xfrm>
-            <a:off x="3639312" y="4169664"/>
-            <a:ext cx="685800" cy="475488"/>
+            <a:off x="3403397" y="4169664"/>
+            <a:ext cx="676656" cy="475488"/>
           </a:xfrm>
           <a:prstGeom prst="rect">
             <a:avLst>
@@ -29477,8 +29543,8 @@
         </p:nvSpPr>
         <p:spPr>
           <a:xfrm>
-            <a:off x="3639312" y="4169664"/>
-            <a:ext cx="685800" cy="475488"/>
+            <a:off x="3403397" y="4169664"/>
+            <a:ext cx="676656" cy="475488"/>
           </a:xfrm>
           <a:prstGeom prst="rect">
             <a:avLst/>
@@ -29516,8 +29582,8 @@
         </p:nvSpPr>
         <p:spPr>
           <a:xfrm>
-            <a:off x="4447032" y="4169664"/>
-            <a:ext cx="685800" cy="475488"/>
+            <a:off x="4129430" y="4169664"/>
+            <a:ext cx="676656" cy="475488"/>
           </a:xfrm>
           <a:prstGeom prst="rect">
             <a:avLst>
@@ -29543,8 +29609,8 @@
         </p:nvSpPr>
         <p:spPr>
           <a:xfrm>
-            <a:off x="4447032" y="4169664"/>
-            <a:ext cx="685800" cy="475488"/>
+            <a:off x="4129430" y="4169664"/>
+            <a:ext cx="676656" cy="475488"/>
           </a:xfrm>
           <a:prstGeom prst="rect">
             <a:avLst/>
@@ -29568,7 +29634,7 @@
                 <a:ea typeface="Trebuchet MS" pitchFamily="34" charset="-122"/>
                 <a:cs typeface="Trebuchet MS" pitchFamily="34" charset="-120"/>
               </a:rPr>
-              <a:t>oo</a:t>
+              <a:t>o</a:t>
             </a:r>
             <a:endParaRPr lang="en-US" sz="900" dirty="0"/>
           </a:p>
@@ -29582,8 +29648,8 @@
         </p:nvSpPr>
         <p:spPr>
           <a:xfrm>
-            <a:off x="5254752" y="4169664"/>
-            <a:ext cx="685800" cy="475488"/>
+            <a:off x="4855464" y="4169664"/>
+            <a:ext cx="676656" cy="475488"/>
           </a:xfrm>
           <a:prstGeom prst="rect">
             <a:avLst>
@@ -29609,8 +29675,8 @@
         </p:nvSpPr>
         <p:spPr>
           <a:xfrm>
-            <a:off x="5254752" y="4169664"/>
-            <a:ext cx="685800" cy="475488"/>
+            <a:off x="4855464" y="4169664"/>
+            <a:ext cx="676656" cy="475488"/>
           </a:xfrm>
           <a:prstGeom prst="rect">
             <a:avLst/>
@@ -29648,8 +29714,8 @@
         </p:nvSpPr>
         <p:spPr>
           <a:xfrm>
-            <a:off x="6062472" y="4169664"/>
-            <a:ext cx="685800" cy="475488"/>
+            <a:off x="5581498" y="4169664"/>
+            <a:ext cx="676656" cy="475488"/>
           </a:xfrm>
           <a:prstGeom prst="rect">
             <a:avLst>
@@ -29675,8 +29741,8 @@
         </p:nvSpPr>
         <p:spPr>
           <a:xfrm>
-            <a:off x="6062472" y="4169664"/>
-            <a:ext cx="685800" cy="475488"/>
+            <a:off x="5581498" y="4169664"/>
+            <a:ext cx="676656" cy="475488"/>
           </a:xfrm>
           <a:prstGeom prst="rect">
             <a:avLst/>
@@ -29714,8 +29780,8 @@
         </p:nvSpPr>
         <p:spPr>
           <a:xfrm>
-            <a:off x="6870192" y="4169664"/>
-            <a:ext cx="685800" cy="475488"/>
+            <a:off x="6307531" y="4169664"/>
+            <a:ext cx="676656" cy="475488"/>
           </a:xfrm>
           <a:prstGeom prst="rect">
             <a:avLst>
@@ -29741,8 +29807,8 @@
         </p:nvSpPr>
         <p:spPr>
           <a:xfrm>
-            <a:off x="6870192" y="4169664"/>
-            <a:ext cx="685800" cy="475488"/>
+            <a:off x="6307531" y="4169664"/>
+            <a:ext cx="676656" cy="475488"/>
           </a:xfrm>
           <a:prstGeom prst="rect">
             <a:avLst/>
@@ -29780,8 +29846,8 @@
         </p:nvSpPr>
         <p:spPr>
           <a:xfrm>
-            <a:off x="7677912" y="4169664"/>
-            <a:ext cx="685800" cy="475488"/>
+            <a:off x="7033565" y="4169664"/>
+            <a:ext cx="676656" cy="475488"/>
           </a:xfrm>
           <a:prstGeom prst="rect">
             <a:avLst>
@@ -29807,8 +29873,8 @@
         </p:nvSpPr>
         <p:spPr>
           <a:xfrm>
-            <a:off x="7677912" y="4169664"/>
-            <a:ext cx="685800" cy="475488"/>
+            <a:off x="7033565" y="4169664"/>
+            <a:ext cx="676656" cy="475488"/>
           </a:xfrm>
           <a:prstGeom prst="rect">
             <a:avLst/>
@@ -29832,7 +29898,73 @@
                 <a:ea typeface="Trebuchet MS" pitchFamily="34" charset="-122"/>
                 <a:cs typeface="Trebuchet MS" pitchFamily="34" charset="-120"/>
               </a:rPr>
-              <a:t>le</a:t>
+              <a:t>l</a:t>
+            </a:r>
+            <a:endParaRPr lang="en-US" sz="900" dirty="0"/>
+          </a:p>
+        </p:txBody>
+      </p:sp>
+      <p:sp>
+        <p:nvSpPr>
+          <p:cNvPr id="59" name="Shape 57"/>
+          <p:cNvSpPr/>
+          <p:nvPr/>
+        </p:nvSpPr>
+        <p:spPr>
+          <a:xfrm>
+            <a:off x="7759598" y="4169664"/>
+            <a:ext cx="676656" cy="475488"/>
+          </a:xfrm>
+          <a:prstGeom prst="rect">
+            <a:avLst>
+              <a:gd name="adj" fmla="val 7692"/>
+            </a:avLst>
+          </a:prstGeom>
+          <a:solidFill>
+            <a:srgbClr val="FFFFFF"/>
+          </a:solidFill>
+          <a:ln w="12700">
+            <a:solidFill>
+              <a:srgbClr val="DB2777"/>
+            </a:solidFill>
+            <a:prstDash val="solid"/>
+          </a:ln>
+        </p:spPr>
+      </p:sp>
+      <p:sp>
+        <p:nvSpPr>
+          <p:cNvPr id="60" name="Text 58"/>
+          <p:cNvSpPr/>
+          <p:nvPr/>
+        </p:nvSpPr>
+        <p:spPr>
+          <a:xfrm>
+            <a:off x="7759598" y="4169664"/>
+            <a:ext cx="676656" cy="475488"/>
+          </a:xfrm>
+          <a:prstGeom prst="rect">
+            <a:avLst/>
+          </a:prstGeom>
+          <a:noFill/>
+          <a:ln/>
+        </p:spPr>
+        <p:txBody>
+          <a:bodyPr wrap="square" lIns="0" tIns="0" rIns="0" bIns="0" rtlCol="0" anchor="ctr"/>
+          <a:lstStyle/>
+          <a:p>
+            <a:pPr algn="ctr" indent="0" marL="0">
+              <a:buNone/>
+            </a:pPr>
+            <a:r>
+              <a:rPr lang="en-US" sz="900" b="1" dirty="0">
+                <a:solidFill>
+                  <a:srgbClr val="9D174D"/>
+                </a:solidFill>
+                <a:latin typeface="Trebuchet MS" pitchFamily="34" charset="0"/>
+                <a:ea typeface="Trebuchet MS" pitchFamily="34" charset="-122"/>
+                <a:cs typeface="Trebuchet MS" pitchFamily="34" charset="-120"/>
+              </a:rPr>
+              <a:t>e</a:t>
             </a:r>
             <a:endParaRPr lang="en-US" sz="900" dirty="0"/>
           </a:p>
@@ -35441,7 +35573,7 @@
                 <a:ea typeface="Trebuchet MS" pitchFamily="34" charset="-122"/>
                 <a:cs typeface="Trebuchet MS" pitchFamily="34" charset="-120"/>
               </a:rPr>
-              <a:t>i</a:t>
+              <a:t>ir</a:t>
             </a:r>
             <a:endParaRPr lang="en-US" sz="900" dirty="0"/>
           </a:p>
@@ -35573,7 +35705,7 @@
                 <a:ea typeface="Trebuchet MS" pitchFamily="34" charset="-122"/>
                 <a:cs typeface="Trebuchet MS" pitchFamily="34" charset="-120"/>
               </a:rPr>
-              <a:t>r</a:t>
+              <a:t>e</a:t>
             </a:r>
             <a:endParaRPr lang="en-US" sz="900" dirty="0"/>
           </a:p>
@@ -35639,7 +35771,7 @@
                 <a:ea typeface="Trebuchet MS" pitchFamily="34" charset="-122"/>
                 <a:cs typeface="Trebuchet MS" pitchFamily="34" charset="-120"/>
               </a:rPr>
-              <a:t>e</a:t>
+              <a:t>m</a:t>
             </a:r>
             <a:endParaRPr lang="en-US" sz="900" dirty="0"/>
           </a:p>
@@ -35705,7 +35837,7 @@
                 <a:ea typeface="Trebuchet MS" pitchFamily="34" charset="-122"/>
                 <a:cs typeface="Trebuchet MS" pitchFamily="34" charset="-120"/>
               </a:rPr>
-              <a:t>m</a:t>
+              <a:t>o</a:t>
             </a:r>
             <a:endParaRPr lang="en-US" sz="900" dirty="0"/>
           </a:p>
@@ -35771,7 +35903,7 @@
                 <a:ea typeface="Trebuchet MS" pitchFamily="34" charset="-122"/>
                 <a:cs typeface="Trebuchet MS" pitchFamily="34" charset="-120"/>
               </a:rPr>
-              <a:t>oo</a:t>
+              <a:t>v</a:t>
             </a:r>
             <a:endParaRPr lang="en-US" sz="900" dirty="0"/>
           </a:p>
@@ -35837,7 +35969,7 @@
                 <a:ea typeface="Trebuchet MS" pitchFamily="34" charset="-122"/>
                 <a:cs typeface="Trebuchet MS" pitchFamily="34" charset="-120"/>
               </a:rPr>
-              <a:t>v</a:t>
+              <a:t>a</a:t>
             </a:r>
             <a:endParaRPr lang="en-US" sz="900" dirty="0"/>
           </a:p>
@@ -35903,7 +36035,7 @@
                 <a:ea typeface="Trebuchet MS" pitchFamily="34" charset="-122"/>
                 <a:cs typeface="Trebuchet MS" pitchFamily="34" charset="-120"/>
               </a:rPr>
-              <a:t>a</a:t>
+              <a:t>b</a:t>
             </a:r>
             <a:endParaRPr lang="en-US" sz="900" dirty="0"/>
           </a:p>
@@ -35969,7 +36101,7 @@
                 <a:ea typeface="Trebuchet MS" pitchFamily="34" charset="-122"/>
                 <a:cs typeface="Trebuchet MS" pitchFamily="34" charset="-120"/>
               </a:rPr>
-              <a:t>b</a:t>
+              <a:t>l</a:t>
             </a:r>
             <a:endParaRPr lang="en-US" sz="900" dirty="0"/>
           </a:p>
@@ -36035,7 +36167,7 @@
                 <a:ea typeface="Trebuchet MS" pitchFamily="34" charset="-122"/>
                 <a:cs typeface="Trebuchet MS" pitchFamily="34" charset="-120"/>
               </a:rPr>
-              <a:t>le</a:t>
+              <a:t>e</a:t>
             </a:r>
             <a:endParaRPr lang="en-US" sz="900" dirty="0"/>
           </a:p>
@@ -40292,7 +40424,7 @@
                 <a:ea typeface="Calibri" pitchFamily="34" charset="-122"/>
                 <a:cs typeface="Calibri" pitchFamily="34" charset="-120"/>
               </a:rPr>
-              <a:t>1.  A 'remover' is something or someone that takes things away.</a:t>
+              <a:t>1.  The prefix 'ir' in 'irremovable' means 'not'.</a:t>
             </a:r>
             <a:endParaRPr lang="en-US" sz="1300" dirty="0"/>
           </a:p>
@@ -40431,7 +40563,7 @@
                 <a:ea typeface="Calibri" pitchFamily="34" charset="-122"/>
                 <a:cs typeface="Calibri" pitchFamily="34" charset="-120"/>
               </a:rPr>
-              <a:t>2.  The root 'remove' comes from Greek.</a:t>
+              <a:t>2.  'Removable' means something that cannot be taken away.</a:t>
             </a:r>
             <a:endParaRPr lang="en-US" sz="1300" dirty="0"/>
           </a:p>
@@ -40570,7 +40702,7 @@
                 <a:ea typeface="Calibri" pitchFamily="34" charset="-122"/>
                 <a:cs typeface="Calibri" pitchFamily="34" charset="-120"/>
               </a:rPr>
-              <a:t>3.  The word 'removal' contains the root 'remove'.</a:t>
+              <a:t>3.  The root 'remove' comes from Greek.</a:t>
             </a:r>
             <a:endParaRPr lang="en-US" sz="1300" dirty="0"/>
           </a:p>
@@ -40593,11 +40725,11 @@
             </a:avLst>
           </a:prstGeom>
           <a:solidFill>
-            <a:srgbClr val="DCFCE7"/>
-          </a:solidFill>
-          <a:ln w="12700">
-            <a:solidFill>
-              <a:srgbClr val="16A34A"/>
+            <a:srgbClr val="FEE2E2"/>
+          </a:solidFill>
+          <a:ln w="12700">
+            <a:solidFill>
+              <a:srgbClr val="DC2626"/>
             </a:solidFill>
             <a:prstDash val="solid"/>
           </a:ln>
@@ -40630,13 +40762,13 @@
             <a:r>
               <a:rPr lang="en-US" sz="1100" b="1" dirty="0">
                 <a:solidFill>
-                  <a:srgbClr val="16A34A"/>
+                  <a:srgbClr val="DC2626"/>
                 </a:solidFill>
                 <a:latin typeface="Trebuchet MS" pitchFamily="34" charset="0"/>
                 <a:ea typeface="Trebuchet MS" pitchFamily="34" charset="-122"/>
                 <a:cs typeface="Trebuchet MS" pitchFamily="34" charset="-120"/>
               </a:rPr>
-              <a:t>TRUE</a:t>
+              <a:t>FALSE</a:t>
             </a:r>
             <a:endParaRPr lang="en-US" sz="1100" dirty="0"/>
           </a:p>
@@ -40709,7 +40841,7 @@
                 <a:ea typeface="Calibri" pitchFamily="34" charset="-122"/>
                 <a:cs typeface="Calibri" pitchFamily="34" charset="-120"/>
               </a:rPr>
-              <a:t>4.  The prefix 'ir' in 'irremovable' means 'not'.</a:t>
+              <a:t>4.  A 'remover' is something or someone that takes things away.</a:t>
             </a:r>
             <a:endParaRPr lang="en-US" sz="1300" dirty="0"/>
           </a:p>
@@ -40848,7 +40980,7 @@
                 <a:ea typeface="Calibri" pitchFamily="34" charset="-122"/>
                 <a:cs typeface="Calibri" pitchFamily="34" charset="-120"/>
               </a:rPr>
-              <a:t>5.  'Removable' means something that cannot be taken away.</a:t>
+              <a:t>5.  The word 'removal' contains the root 'remove'.</a:t>
             </a:r>
             <a:endParaRPr lang="en-US" sz="1300" dirty="0"/>
           </a:p>
@@ -40871,11 +41003,11 @@
             </a:avLst>
           </a:prstGeom>
           <a:solidFill>
-            <a:srgbClr val="FEE2E2"/>
-          </a:solidFill>
-          <a:ln w="12700">
-            <a:solidFill>
-              <a:srgbClr val="DC2626"/>
+            <a:srgbClr val="DCFCE7"/>
+          </a:solidFill>
+          <a:ln w="12700">
+            <a:solidFill>
+              <a:srgbClr val="16A34A"/>
             </a:solidFill>
             <a:prstDash val="solid"/>
           </a:ln>
@@ -40908,13 +41040,13 @@
             <a:r>
               <a:rPr lang="en-US" sz="1100" b="1" dirty="0">
                 <a:solidFill>
-                  <a:srgbClr val="DC2626"/>
+                  <a:srgbClr val="16A34A"/>
                 </a:solidFill>
                 <a:latin typeface="Trebuchet MS" pitchFamily="34" charset="0"/>
                 <a:ea typeface="Trebuchet MS" pitchFamily="34" charset="-122"/>
                 <a:cs typeface="Trebuchet MS" pitchFamily="34" charset="-120"/>
               </a:rPr>
-              <a:t>FALSE</a:t>
+              <a:t>TRUE</a:t>
             </a:r>
             <a:endParaRPr lang="en-US" sz="1100" dirty="0"/>
           </a:p>
